--- a/presentation/NoTSUG-2026-SAS-AI.pptx
+++ b/presentation/NoTSUG-2026-SAS-AI.pptx
@@ -3226,7 +3226,7 @@
                 </a:solidFill>
                 <a:latin typeface="Calibri"/>
               </a:rPr>
-              <a:t>SAS + AI</a:t>
+              <a:t>Teach SAS to Read Minds</a:t>
             </a:r>
           </a:p>
         </p:txBody>
@@ -3265,7 +3265,7 @@
                 </a:solidFill>
                 <a:latin typeface="Calibri"/>
               </a:rPr>
-              <a:t>Calling an LLM from SAS, comparing engines and cost, and building SAS code in GitHub</a:t>
+              <a:t>Claude, PROC HTTP, and a Price Tag: which AI engine is worth the tokens, and how GitHub ships it to SAS Studio</a:t>
             </a:r>
           </a:p>
           <a:p>

--- a/presentation/NoTSUG-2026-SAS-AI.pptx
+++ b/presentation/NoTSUG-2026-SAS-AI.pptx
@@ -7871,13 +7871,13 @@
           <a:p>
             <a:pPr/>
             <a:r>
-              <a:rPr sz="2200">
+              <a:rPr sz="2200" b="0">
                 <a:solidFill>
                   <a:srgbClr val="444F5A"/>
                 </a:solidFill>
                 <a:latin typeface="Calibri"/>
               </a:rPr>
-              <a:t>1. The problem: free text SAS can't quantify</a:t>
+              <a:t>1. The mind-reading problem: free text SAS can't quantify</a:t>
             </a:r>
           </a:p>
         </p:txBody>
@@ -7906,31 +7906,13 @@
           <a:p>
             <a:pPr/>
             <a:r>
-              <a:rPr sz="2200">
+              <a:rPr sz="2200" b="0">
                 <a:solidFill>
                   <a:srgbClr val="444F5A"/>
                 </a:solidFill>
                 <a:latin typeface="Calibri"/>
               </a:rPr>
-              <a:t>2. Project structure (</a:t>
-            </a:r>
-            <a:r>
-              <a:rPr sz="2200">
-                <a:solidFill>
-                  <a:srgbClr val="1F78C8"/>
-                </a:solidFill>
-                <a:latin typeface="Consolas"/>
-              </a:rPr>
-              <a:t>sas/</a:t>
-            </a:r>
-            <a:r>
-              <a:rPr sz="2200">
-                <a:solidFill>
-                  <a:srgbClr val="444F5A"/>
-                </a:solidFill>
-                <a:latin typeface="Calibri"/>
-              </a:rPr>
-              <a:t>)</a:t>
+              <a:t>2. The setup: a SAS Studio project, built in GitHub</a:t>
             </a:r>
           </a:p>
         </p:txBody>
@@ -7959,22 +7941,13 @@
           <a:p>
             <a:pPr/>
             <a:r>
-              <a:rPr sz="2200">
+              <a:rPr sz="2200" b="0">
                 <a:solidFill>
                   <a:srgbClr val="444F5A"/>
                 </a:solidFill>
                 <a:latin typeface="Calibri"/>
               </a:rPr>
-              <a:t>3. Calling the LLM with </a:t>
-            </a:r>
-            <a:r>
-              <a:rPr sz="2200">
-                <a:solidFill>
-                  <a:srgbClr val="1F78C8"/>
-                </a:solidFill>
-                <a:latin typeface="Consolas"/>
-              </a:rPr>
-              <a:t>PROC HTTP</a:t>
+              <a:t>3. Asking Claude: PROC HTTP calls from SAS</a:t>
             </a:r>
           </a:p>
         </p:txBody>
@@ -8003,13 +7976,13 @@
           <a:p>
             <a:pPr/>
             <a:r>
-              <a:rPr sz="2200">
+              <a:rPr sz="2200" b="0">
                 <a:solidFill>
                   <a:srgbClr val="444F5A"/>
                 </a:solidFill>
                 <a:latin typeface="Calibri"/>
               </a:rPr>
-              <a:t>4. Parsing responses</a:t>
+              <a:t>4. Decoding the answer: parsing JSON back into data</a:t>
             </a:r>
           </a:p>
         </p:txBody>
@@ -8038,22 +8011,13 @@
           <a:p>
             <a:pPr/>
             <a:r>
-              <a:rPr sz="2200">
+              <a:rPr sz="2200" b="0">
                 <a:solidFill>
                   <a:srgbClr val="444F5A"/>
                 </a:solidFill>
                 <a:latin typeface="Calibri"/>
               </a:rPr>
-              <a:t>5. Comparing engines: accuracy, calibration, </a:t>
-            </a:r>
-            <a:r>
-              <a:rPr sz="2200" b="1">
-                <a:solidFill>
-                  <a:srgbClr val="444F5A"/>
-                </a:solidFill>
-                <a:latin typeface="Calibri"/>
-              </a:rPr>
-              <a:t>cost</a:t>
+              <a:t>5. Which mind is worth the tokens? Accuracy, calibration, and cost</a:t>
             </a:r>
           </a:p>
         </p:txBody>
@@ -8082,13 +8046,13 @@
           <a:p>
             <a:pPr/>
             <a:r>
-              <a:rPr sz="2200">
+              <a:rPr sz="2200" b="0">
                 <a:solidFill>
                   <a:srgbClr val="444F5A"/>
                 </a:solidFill>
                 <a:latin typeface="Calibri"/>
               </a:rPr>
-              <a:t>6. GitHub building the code and feeding SAS Studio</a:t>
+              <a:t>6. From GitHub to SAS Studio: shipping the code</a:t>
             </a:r>
           </a:p>
         </p:txBody>
@@ -8117,13 +8081,13 @@
           <a:p>
             <a:pPr/>
             <a:r>
-              <a:rPr sz="2200">
+              <a:rPr sz="2200" b="0">
                 <a:solidFill>
                   <a:srgbClr val="444F5A"/>
                 </a:solidFill>
                 <a:latin typeface="Calibri"/>
               </a:rPr>
-              <a:t>7. Lessons and Q&amp;A</a:t>
+              <a:t>7. Lessons learned and Q&amp;A</a:t>
             </a:r>
           </a:p>
         </p:txBody>

--- a/presentation/NoTSUG-2026-SAS-AI.pptx
+++ b/presentation/NoTSUG-2026-SAS-AI.pptx
@@ -14,6 +14,7 @@
     <p:sldId id="262" r:id="rId13"/>
     <p:sldId id="263" r:id="rId14"/>
     <p:sldId id="264" r:id="rId15"/>
+    <p:sldId id="280" r:id="rId31"/>
     <p:sldId id="265" r:id="rId16"/>
     <p:sldId id="266" r:id="rId17"/>
     <p:sldId id="267" r:id="rId18"/>
@@ -3435,7 +3436,7 @@
                 </a:solidFill>
                 <a:latin typeface="Calibri"/>
               </a:rPr>
-              <a:t>Step 1: build the request queue (01_prepare_requests.sas)</a:t>
+              <a:t>How the prompt turns words into numbers</a:t>
             </a:r>
           </a:p>
         </p:txBody>
@@ -3482,13 +3483,357 @@
         </p:nvSpPr>
         <p:spPr>
           <a:xfrm>
-            <a:off x="640080" y="1371600"/>
-            <a:ext cx="10881360" cy="1691640"/>
+            <a:off x="640080" y="1325880"/>
+            <a:ext cx="2514600" cy="411480"/>
           </a:xfrm>
           <a:prstGeom prst="roundRect">
-            <a:avLst>
-              <a:gd name="adj" fmla="val 3000"/>
-            </a:avLst>
+            <a:avLst/>
+          </a:prstGeom>
+          <a:solidFill>
+            <a:srgbClr val="1F78C8"/>
+          </a:solidFill>
+          <a:ln>
+            <a:noFill/>
+          </a:ln>
+        </p:spPr>
+        <p:style>
+          <a:lnRef idx="1">
+            <a:schemeClr val="accent1"/>
+          </a:lnRef>
+          <a:fillRef idx="3">
+            <a:schemeClr val="accent1"/>
+          </a:fillRef>
+          <a:effectRef idx="2">
+            <a:schemeClr val="accent1"/>
+          </a:effectRef>
+          <a:fontRef idx="minor">
+            <a:schemeClr val="lt1"/>
+          </a:fontRef>
+        </p:style>
+        <p:txBody>
+          <a:bodyPr rtlCol="0" anchor="ctr" wrap="square"/>
+          <a:lstStyle/>
+          <a:p>
+            <a:pPr algn="ctr"/>
+            <a:r>
+              <a:rPr sz="1500" b="1">
+                <a:solidFill>
+                  <a:srgbClr val="FFFFFF"/>
+                </a:solidFill>
+                <a:latin typeface="Calibri"/>
+              </a:rPr>
+              <a:t>1. Survey text (data row)</a:t>
+            </a:r>
+          </a:p>
+        </p:txBody>
+      </p:sp>
+      <p:sp>
+        <p:nvSpPr>
+          <p:cNvPr id="7" name="Rounded Rectangle 6"/>
+          <p:cNvSpPr/>
+          <p:nvPr/>
+        </p:nvSpPr>
+        <p:spPr>
+          <a:xfrm>
+            <a:off x="640080" y="1783080"/>
+            <a:ext cx="2514600" cy="1371600"/>
+          </a:xfrm>
+          <a:prstGeom prst="roundRect">
+            <a:avLst/>
+          </a:prstGeom>
+          <a:solidFill>
+            <a:srgbClr val="0B2A4A"/>
+          </a:solidFill>
+          <a:ln>
+            <a:noFill/>
+          </a:ln>
+        </p:spPr>
+        <p:style>
+          <a:lnRef idx="1">
+            <a:schemeClr val="accent1"/>
+          </a:lnRef>
+          <a:fillRef idx="3">
+            <a:schemeClr val="accent1"/>
+          </a:fillRef>
+          <a:effectRef idx="2">
+            <a:schemeClr val="accent1"/>
+          </a:effectRef>
+          <a:fontRef idx="minor">
+            <a:schemeClr val="lt1"/>
+          </a:fontRef>
+        </p:style>
+        <p:txBody>
+          <a:bodyPr rtlCol="0" anchor="ctr" wrap="square"/>
+          <a:lstStyle/>
+          <a:p>
+            <a:pPr algn="ctr"/>
+            <a:r>
+              <a:rPr sz="1400" b="0">
+                <a:solidFill>
+                  <a:srgbClr val="FFFFFF"/>
+                </a:solidFill>
+                <a:latin typeface="Calibri"/>
+              </a:rPr>
+              <a:t>"Every once in a while it catches my eye."</a:t>
+            </a:r>
+          </a:p>
+        </p:txBody>
+      </p:sp>
+      <p:sp>
+        <p:nvSpPr>
+          <p:cNvPr id="8" name="Right Arrow 7"/>
+          <p:cNvSpPr/>
+          <p:nvPr/>
+        </p:nvSpPr>
+        <p:spPr>
+          <a:xfrm>
+            <a:off x="3172968" y="2514600"/>
+            <a:ext cx="237744" cy="274320"/>
+          </a:xfrm>
+          <a:prstGeom prst="rightArrow">
+            <a:avLst/>
+          </a:prstGeom>
+          <a:solidFill>
+            <a:srgbClr val="444F5A"/>
+          </a:solidFill>
+          <a:ln>
+            <a:noFill/>
+          </a:ln>
+        </p:spPr>
+        <p:style>
+          <a:lnRef idx="1">
+            <a:schemeClr val="accent1"/>
+          </a:lnRef>
+          <a:fillRef idx="3">
+            <a:schemeClr val="accent1"/>
+          </a:fillRef>
+          <a:effectRef idx="2">
+            <a:schemeClr val="accent1"/>
+          </a:effectRef>
+          <a:fontRef idx="minor">
+            <a:schemeClr val="lt1"/>
+          </a:fontRef>
+        </p:style>
+        <p:txBody>
+          <a:bodyPr rtlCol="0" anchor="ctr"/>
+          <a:lstStyle/>
+          <a:p>
+            <a:pPr algn="ctr"/>
+          </a:p>
+        </p:txBody>
+      </p:sp>
+      <p:sp>
+        <p:nvSpPr>
+          <p:cNvPr id="9" name="Rounded Rectangle 8"/>
+          <p:cNvSpPr/>
+          <p:nvPr/>
+        </p:nvSpPr>
+        <p:spPr>
+          <a:xfrm>
+            <a:off x="3429000" y="1325880"/>
+            <a:ext cx="2514600" cy="411480"/>
+          </a:xfrm>
+          <a:prstGeom prst="roundRect">
+            <a:avLst/>
+          </a:prstGeom>
+          <a:solidFill>
+            <a:srgbClr val="0B2A4A"/>
+          </a:solidFill>
+          <a:ln>
+            <a:noFill/>
+          </a:ln>
+        </p:spPr>
+        <p:style>
+          <a:lnRef idx="1">
+            <a:schemeClr val="accent1"/>
+          </a:lnRef>
+          <a:fillRef idx="3">
+            <a:schemeClr val="accent1"/>
+          </a:fillRef>
+          <a:effectRef idx="2">
+            <a:schemeClr val="accent1"/>
+          </a:effectRef>
+          <a:fontRef idx="minor">
+            <a:schemeClr val="lt1"/>
+          </a:fontRef>
+        </p:style>
+        <p:txBody>
+          <a:bodyPr rtlCol="0" anchor="ctr" wrap="square"/>
+          <a:lstStyle/>
+          <a:p>
+            <a:pPr algn="ctr"/>
+            <a:r>
+              <a:rPr sz="1500" b="1">
+                <a:solidFill>
+                  <a:srgbClr val="FFFFFF"/>
+                </a:solidFill>
+                <a:latin typeface="Calibri"/>
+              </a:rPr>
+              <a:t>2. Prompt (system + text)</a:t>
+            </a:r>
+          </a:p>
+        </p:txBody>
+      </p:sp>
+      <p:sp>
+        <p:nvSpPr>
+          <p:cNvPr id="10" name="Rounded Rectangle 9"/>
+          <p:cNvSpPr/>
+          <p:nvPr/>
+        </p:nvSpPr>
+        <p:spPr>
+          <a:xfrm>
+            <a:off x="3429000" y="1783080"/>
+            <a:ext cx="2514600" cy="1371600"/>
+          </a:xfrm>
+          <a:prstGeom prst="roundRect">
+            <a:avLst/>
+          </a:prstGeom>
+          <a:solidFill>
+            <a:srgbClr val="1F78C8"/>
+          </a:solidFill>
+          <a:ln>
+            <a:noFill/>
+          </a:ln>
+        </p:spPr>
+        <p:style>
+          <a:lnRef idx="1">
+            <a:schemeClr val="accent1"/>
+          </a:lnRef>
+          <a:fillRef idx="3">
+            <a:schemeClr val="accent1"/>
+          </a:fillRef>
+          <a:effectRef idx="2">
+            <a:schemeClr val="accent1"/>
+          </a:effectRef>
+          <a:fontRef idx="minor">
+            <a:schemeClr val="lt1"/>
+          </a:fontRef>
+        </p:style>
+        <p:txBody>
+          <a:bodyPr rtlCol="0" anchor="ctr" wrap="square"/>
+          <a:lstStyle/>
+          <a:p>
+            <a:pPr algn="ctr"/>
+            <a:r>
+              <a:rPr sz="1400" b="0">
+                <a:solidFill>
+                  <a:srgbClr val="FFFFFF"/>
+                </a:solidFill>
+                <a:latin typeface="Calibri"/>
+              </a:rPr>
+              <a:t>Classify into Never / Rarely / Sometimes / Often / Always. Add reliability_score 0-1. Reply with ONLY flat JSON.</a:t>
+            </a:r>
+          </a:p>
+        </p:txBody>
+      </p:sp>
+      <p:sp>
+        <p:nvSpPr>
+          <p:cNvPr id="11" name="Right Arrow 10"/>
+          <p:cNvSpPr/>
+          <p:nvPr/>
+        </p:nvSpPr>
+        <p:spPr>
+          <a:xfrm>
+            <a:off x="5961888" y="2514600"/>
+            <a:ext cx="237744" cy="274320"/>
+          </a:xfrm>
+          <a:prstGeom prst="rightArrow">
+            <a:avLst/>
+          </a:prstGeom>
+          <a:solidFill>
+            <a:srgbClr val="444F5A"/>
+          </a:solidFill>
+          <a:ln>
+            <a:noFill/>
+          </a:ln>
+        </p:spPr>
+        <p:style>
+          <a:lnRef idx="1">
+            <a:schemeClr val="accent1"/>
+          </a:lnRef>
+          <a:fillRef idx="3">
+            <a:schemeClr val="accent1"/>
+          </a:fillRef>
+          <a:effectRef idx="2">
+            <a:schemeClr val="accent1"/>
+          </a:effectRef>
+          <a:fontRef idx="minor">
+            <a:schemeClr val="lt1"/>
+          </a:fontRef>
+        </p:style>
+        <p:txBody>
+          <a:bodyPr rtlCol="0" anchor="ctr"/>
+          <a:lstStyle/>
+          <a:p>
+            <a:pPr algn="ctr"/>
+          </a:p>
+        </p:txBody>
+      </p:sp>
+      <p:sp>
+        <p:nvSpPr>
+          <p:cNvPr id="12" name="Rounded Rectangle 11"/>
+          <p:cNvSpPr/>
+          <p:nvPr/>
+        </p:nvSpPr>
+        <p:spPr>
+          <a:xfrm>
+            <a:off x="6217920" y="1325880"/>
+            <a:ext cx="2514600" cy="411480"/>
+          </a:xfrm>
+          <a:prstGeom prst="roundRect">
+            <a:avLst/>
+          </a:prstGeom>
+          <a:solidFill>
+            <a:srgbClr val="0B2A4A"/>
+          </a:solidFill>
+          <a:ln>
+            <a:noFill/>
+          </a:ln>
+        </p:spPr>
+        <p:style>
+          <a:lnRef idx="1">
+            <a:schemeClr val="accent1"/>
+          </a:lnRef>
+          <a:fillRef idx="3">
+            <a:schemeClr val="accent1"/>
+          </a:fillRef>
+          <a:effectRef idx="2">
+            <a:schemeClr val="accent1"/>
+          </a:effectRef>
+          <a:fontRef idx="minor">
+            <a:schemeClr val="lt1"/>
+          </a:fontRef>
+        </p:style>
+        <p:txBody>
+          <a:bodyPr rtlCol="0" anchor="ctr" wrap="square"/>
+          <a:lstStyle/>
+          <a:p>
+            <a:pPr algn="ctr"/>
+            <a:r>
+              <a:rPr sz="1500" b="1">
+                <a:solidFill>
+                  <a:srgbClr val="FFFFFF"/>
+                </a:solidFill>
+                <a:latin typeface="Calibri"/>
+              </a:rPr>
+              <a:t>3. Claude replies</a:t>
+            </a:r>
+          </a:p>
+        </p:txBody>
+      </p:sp>
+      <p:sp>
+        <p:nvSpPr>
+          <p:cNvPr id="13" name="Rounded Rectangle 12"/>
+          <p:cNvSpPr/>
+          <p:nvPr/>
+        </p:nvSpPr>
+        <p:spPr>
+          <a:xfrm>
+            <a:off x="6217920" y="1783080"/>
+            <a:ext cx="2514600" cy="1371600"/>
+          </a:xfrm>
+          <a:prstGeom prst="roundRect">
+            <a:avLst/>
           </a:prstGeom>
           <a:solidFill>
             <a:srgbClr val="1E1E2E"/>
@@ -3512,6 +3857,70 @@
           </a:fontRef>
         </p:style>
         <p:txBody>
+          <a:bodyPr rtlCol="0" anchor="ctr" wrap="square"/>
+          <a:lstStyle/>
+          <a:p>
+            <a:pPr algn="ctr"/>
+            <a:r>
+              <a:rPr sz="1500" b="0">
+                <a:solidFill>
+                  <a:srgbClr val="E6E6F0"/>
+                </a:solidFill>
+                <a:latin typeface="Consolas"/>
+              </a:rPr>
+              <a:t>{"decision": "Rarely",</a:t>
+            </a:r>
+          </a:p>
+          <a:p>
+            <a:pPr algn="ctr"/>
+            <a:r>
+              <a:rPr sz="1500" b="0">
+                <a:solidFill>
+                  <a:srgbClr val="E6E6F0"/>
+                </a:solidFill>
+                <a:latin typeface="Consolas"/>
+              </a:rPr>
+              <a:t>"reliability_score": 0.9}</a:t>
+            </a:r>
+          </a:p>
+        </p:txBody>
+      </p:sp>
+      <p:sp>
+        <p:nvSpPr>
+          <p:cNvPr id="14" name="Right Arrow 13"/>
+          <p:cNvSpPr/>
+          <p:nvPr/>
+        </p:nvSpPr>
+        <p:spPr>
+          <a:xfrm>
+            <a:off x="8750808" y="2514600"/>
+            <a:ext cx="237744" cy="274320"/>
+          </a:xfrm>
+          <a:prstGeom prst="rightArrow">
+            <a:avLst/>
+          </a:prstGeom>
+          <a:solidFill>
+            <a:srgbClr val="444F5A"/>
+          </a:solidFill>
+          <a:ln>
+            <a:noFill/>
+          </a:ln>
+        </p:spPr>
+        <p:style>
+          <a:lnRef idx="1">
+            <a:schemeClr val="accent1"/>
+          </a:lnRef>
+          <a:fillRef idx="3">
+            <a:schemeClr val="accent1"/>
+          </a:fillRef>
+          <a:effectRef idx="2">
+            <a:schemeClr val="accent1"/>
+          </a:effectRef>
+          <a:fontRef idx="minor">
+            <a:schemeClr val="lt1"/>
+          </a:fontRef>
+        </p:style>
+        <p:txBody>
           <a:bodyPr rtlCol="0" anchor="ctr"/>
           <a:lstStyle/>
           <a:p>
@@ -3521,148 +3930,573 @@
       </p:sp>
       <p:sp>
         <p:nvSpPr>
-          <p:cNvPr id="7" name="TextBox 6"/>
-          <p:cNvSpPr txBox="1"/>
-          <p:nvPr/>
-        </p:nvSpPr>
-        <p:spPr>
-          <a:xfrm>
-            <a:off x="822960" y="1463040"/>
-            <a:ext cx="10515600" cy="1508760"/>
-          </a:xfrm>
-          <a:prstGeom prst="rect">
-            <a:avLst/>
-          </a:prstGeom>
-          <a:noFill/>
-        </p:spPr>
-        <p:txBody>
-          <a:bodyPr wrap="square">
-            <a:spAutoFit/>
-          </a:bodyPr>
-          <a:lstStyle/>
-          <a:p>
-            <a:r>
-              <a:rPr sz="1600">
-                <a:solidFill>
-                  <a:srgbClr val="E6E6F0"/>
-                </a:solidFill>
-                <a:latin typeface="Consolas"/>
-              </a:rPr>
-              <a:t>create table proj.claude_requests as</a:t>
-            </a:r>
-          </a:p>
-          <a:p>
-            <a:r>
-              <a:rPr sz="1600">
-                <a:solidFill>
-                  <a:srgbClr val="E6E6F0"/>
-                </a:solidFill>
-                <a:latin typeface="Consolas"/>
-              </a:rPr>
-              <a:t>select monotonic() as request_id, e.engine_id, ...</a:t>
-            </a:r>
-          </a:p>
-          <a:p>
-            <a:r>
-              <a:rPr sz="1600">
-                <a:solidFill>
-                  <a:srgbClr val="E6E6F0"/>
-                </a:solidFill>
-                <a:latin typeface="Consolas"/>
-              </a:rPr>
-              <a:t>       'PENDING' as status, ...</a:t>
-            </a:r>
-          </a:p>
-          <a:p>
-            <a:r>
-              <a:rPr sz="1600">
-                <a:solidFill>
-                  <a:srgbClr val="E6E6F0"/>
-                </a:solidFill>
-                <a:latin typeface="Consolas"/>
-              </a:rPr>
-              <a:t>from proj.claude_engines as e,</a:t>
-            </a:r>
-          </a:p>
-          <a:p>
-            <a:r>
-              <a:rPr sz="1600">
-                <a:solidFill>
-                  <a:srgbClr val="E6E6F0"/>
-                </a:solidFill>
-                <a:latin typeface="Consolas"/>
-              </a:rPr>
-              <a:t>     proj.survey_responses(obs=&amp;max_responses.) as s;</a:t>
-            </a:r>
-          </a:p>
-        </p:txBody>
-      </p:sp>
-      <p:sp>
-        <p:nvSpPr>
-          <p:cNvPr id="8" name="TextBox 7"/>
-          <p:cNvSpPr txBox="1"/>
-          <p:nvPr/>
-        </p:nvSpPr>
-        <p:spPr>
-          <a:xfrm>
-            <a:off x="640080" y="3200400"/>
-            <a:ext cx="10881360" cy="548640"/>
-          </a:xfrm>
-          <a:prstGeom prst="rect">
-            <a:avLst/>
-          </a:prstGeom>
-          <a:noFill/>
-        </p:spPr>
-        <p:txBody>
-          <a:bodyPr wrap="square">
-            <a:spAutoFit/>
-          </a:bodyPr>
-          <a:lstStyle/>
-          <a:p>
-            <a:pPr/>
-            <a:r>
-              <a:rPr sz="2200">
+          <p:cNvPr id="15" name="Rounded Rectangle 14"/>
+          <p:cNvSpPr/>
+          <p:nvPr/>
+        </p:nvSpPr>
+        <p:spPr>
+          <a:xfrm>
+            <a:off x="9006840" y="1325880"/>
+            <a:ext cx="2514600" cy="411480"/>
+          </a:xfrm>
+          <a:prstGeom prst="roundRect">
+            <a:avLst/>
+          </a:prstGeom>
+          <a:solidFill>
+            <a:srgbClr val="0B2A4A"/>
+          </a:solidFill>
+          <a:ln>
+            <a:noFill/>
+          </a:ln>
+        </p:spPr>
+        <p:style>
+          <a:lnRef idx="1">
+            <a:schemeClr val="accent1"/>
+          </a:lnRef>
+          <a:fillRef idx="3">
+            <a:schemeClr val="accent1"/>
+          </a:fillRef>
+          <a:effectRef idx="2">
+            <a:schemeClr val="accent1"/>
+          </a:effectRef>
+          <a:fontRef idx="minor">
+            <a:schemeClr val="lt1"/>
+          </a:fontRef>
+        </p:style>
+        <p:txBody>
+          <a:bodyPr rtlCol="0" anchor="ctr" wrap="square"/>
+          <a:lstStyle/>
+          <a:p>
+            <a:pPr algn="ctr"/>
+            <a:r>
+              <a:rPr sz="1500" b="1">
+                <a:solidFill>
+                  <a:srgbClr val="FFFFFF"/>
+                </a:solidFill>
+                <a:latin typeface="Calibri"/>
+              </a:rPr>
+              <a:t>4. SAS makes numbers</a:t>
+            </a:r>
+          </a:p>
+        </p:txBody>
+      </p:sp>
+      <p:sp>
+        <p:nvSpPr>
+          <p:cNvPr id="16" name="Rounded Rectangle 15"/>
+          <p:cNvSpPr/>
+          <p:nvPr/>
+        </p:nvSpPr>
+        <p:spPr>
+          <a:xfrm>
+            <a:off x="9006840" y="1783080"/>
+            <a:ext cx="2514600" cy="1371600"/>
+          </a:xfrm>
+          <a:prstGeom prst="roundRect">
+            <a:avLst/>
+          </a:prstGeom>
+          <a:solidFill>
+            <a:srgbClr val="00A3A3"/>
+          </a:solidFill>
+          <a:ln>
+            <a:noFill/>
+          </a:ln>
+        </p:spPr>
+        <p:style>
+          <a:lnRef idx="1">
+            <a:schemeClr val="accent1"/>
+          </a:lnRef>
+          <a:fillRef idx="3">
+            <a:schemeClr val="accent1"/>
+          </a:fillRef>
+          <a:effectRef idx="2">
+            <a:schemeClr val="accent1"/>
+          </a:effectRef>
+          <a:fontRef idx="minor">
+            <a:schemeClr val="lt1"/>
+          </a:fontRef>
+        </p:style>
+        <p:txBody>
+          <a:bodyPr rtlCol="0" anchor="ctr" wrap="square"/>
+          <a:lstStyle/>
+          <a:p>
+            <a:pPr algn="ctr"/>
+            <a:r>
+              <a:rPr sz="1400" b="0">
+                <a:solidFill>
+                  <a:srgbClr val="FFFFFF"/>
+                </a:solidFill>
+                <a:latin typeface="Calibri"/>
+              </a:rPr>
+              <a:t>json_field() pulls both fields; bucket_rank maps Rarely = 2</a:t>
+            </a:r>
+          </a:p>
+        </p:txBody>
+      </p:sp>
+      <p:graphicFrame>
+        <p:nvGraphicFramePr>
+          <p:cNvPr id="17" name="Table 16"/>
+          <p:cNvGraphicFramePr>
+            <a:graphicFrameLocks noGrp="1"/>
+          </p:cNvGraphicFramePr>
+          <p:nvPr/>
+        </p:nvGraphicFramePr>
+        <p:xfrm>
+          <a:off x="640080" y="3520440"/>
+          <a:ext cx="10881360" cy="2194560"/>
+        </p:xfrm>
+        <a:graphic>
+          <a:graphicData uri="http://schemas.openxmlformats.org/drawingml/2006/table">
+            <a:tbl>
+              <a:tblPr firstRow="1" bandRow="1">
+                <a:tableStyleId>{5C22544A-7EE6-4342-B048-85BDC9FD1C3A}</a:tableStyleId>
+              </a:tblPr>
+              <a:tblGrid>
+                <a:gridCol w="5852160"/>
+                <a:gridCol w="2011680"/>
+                <a:gridCol w="3017520"/>
+              </a:tblGrid>
+              <a:tr h="365760">
+                <a:tc>
+                  <a:txBody>
+                    <a:bodyPr/>
+                    <a:lstStyle/>
+                    <a:p>
+                      <a:r>
+                        <a:rPr sz="1500" b="1">
+                          <a:solidFill>
+                            <a:srgbClr val="FFFFFF"/>
+                          </a:solidFill>
+                          <a:latin typeface="Calibri"/>
+                        </a:rPr>
+                        <a:t>Respondent says</a:t>
+                      </a:r>
+                    </a:p>
+                  </a:txBody>
+                  <a:tcPr marT="27432" marB="27432">
+                    <a:solidFill>
+                      <a:srgbClr val="1F78C8"/>
+                    </a:solidFill>
+                  </a:tcPr>
+                </a:tc>
+                <a:tc>
+                  <a:txBody>
+                    <a:bodyPr/>
+                    <a:lstStyle/>
+                    <a:p>
+                      <a:r>
+                        <a:rPr sz="1500" b="1">
+                          <a:solidFill>
+                            <a:srgbClr val="FFFFFF"/>
+                          </a:solidFill>
+                          <a:latin typeface="Calibri"/>
+                        </a:rPr>
+                        <a:t>Bucket</a:t>
+                      </a:r>
+                    </a:p>
+                  </a:txBody>
+                  <a:tcPr marT="27432" marB="27432">
+                    <a:solidFill>
+                      <a:srgbClr val="1F78C8"/>
+                    </a:solidFill>
+                  </a:tcPr>
+                </a:tc>
+                <a:tc>
+                  <a:txBody>
+                    <a:bodyPr/>
+                    <a:lstStyle/>
+                    <a:p>
+                      <a:r>
+                        <a:rPr sz="1500" b="1">
+                          <a:solidFill>
+                            <a:srgbClr val="FFFFFF"/>
+                          </a:solidFill>
+                          <a:latin typeface="Calibri"/>
+                        </a:rPr>
+                        <a:t>Number (bucket_rank)</a:t>
+                      </a:r>
+                    </a:p>
+                  </a:txBody>
+                  <a:tcPr marT="27432" marB="27432">
+                    <a:solidFill>
+                      <a:srgbClr val="1F78C8"/>
+                    </a:solidFill>
+                  </a:tcPr>
+                </a:tc>
+              </a:tr>
+              <a:tr h="365760">
+                <a:tc>
+                  <a:txBody>
+                    <a:bodyPr/>
+                    <a:lstStyle/>
+                    <a:p>
+                      <a:r>
+                        <a:rPr sz="1500" b="0">
+                          <a:solidFill>
+                            <a:srgbClr val="444F5A"/>
+                          </a:solidFill>
+                          <a:latin typeface="Calibri"/>
+                        </a:rPr>
+                        <a:t>It never really grabs my attention.</a:t>
+                      </a:r>
+                    </a:p>
+                  </a:txBody>
+                  <a:tcPr marT="27432" marB="27432">
+                    <a:solidFill>
+                      <a:srgbClr val="F3F7FB"/>
+                    </a:solidFill>
+                  </a:tcPr>
+                </a:tc>
+                <a:tc>
+                  <a:txBody>
+                    <a:bodyPr/>
+                    <a:lstStyle/>
+                    <a:p>
+                      <a:r>
+                        <a:rPr sz="1500" b="1">
+                          <a:solidFill>
+                            <a:srgbClr val="444F5A"/>
+                          </a:solidFill>
+                          <a:latin typeface="Calibri"/>
+                        </a:rPr>
+                        <a:t>Never</a:t>
+                      </a:r>
+                    </a:p>
+                  </a:txBody>
+                  <a:tcPr marT="27432" marB="27432">
+                    <a:solidFill>
+                      <a:srgbClr val="F3F7FB"/>
+                    </a:solidFill>
+                  </a:tcPr>
+                </a:tc>
+                <a:tc>
+                  <a:txBody>
+                    <a:bodyPr/>
+                    <a:lstStyle/>
+                    <a:p>
+                      <a:r>
+                        <a:rPr sz="1500" b="0">
+                          <a:solidFill>
+                            <a:srgbClr val="444F5A"/>
+                          </a:solidFill>
+                          <a:latin typeface="Calibri"/>
+                        </a:rPr>
+                        <a:t>1</a:t>
+                      </a:r>
+                    </a:p>
+                  </a:txBody>
+                  <a:tcPr marT="27432" marB="27432">
+                    <a:solidFill>
+                      <a:srgbClr val="F3F7FB"/>
+                    </a:solidFill>
+                  </a:tcPr>
+                </a:tc>
+              </a:tr>
+              <a:tr h="365760">
+                <a:tc>
+                  <a:txBody>
+                    <a:bodyPr/>
+                    <a:lstStyle/>
+                    <a:p>
+                      <a:r>
+                        <a:rPr sz="1500" b="0">
+                          <a:solidFill>
+                            <a:srgbClr val="444F5A"/>
+                          </a:solidFill>
+                          <a:latin typeface="Calibri"/>
+                        </a:rPr>
+                        <a:t>Every once in a while it catches my eye.</a:t>
+                      </a:r>
+                    </a:p>
+                  </a:txBody>
+                  <a:tcPr marT="27432" marB="27432">
+                    <a:solidFill>
+                      <a:srgbClr val="FFFFFF"/>
+                    </a:solidFill>
+                  </a:tcPr>
+                </a:tc>
+                <a:tc>
+                  <a:txBody>
+                    <a:bodyPr/>
+                    <a:lstStyle/>
+                    <a:p>
+                      <a:r>
+                        <a:rPr sz="1500" b="1">
+                          <a:solidFill>
+                            <a:srgbClr val="444F5A"/>
+                          </a:solidFill>
+                          <a:latin typeface="Calibri"/>
+                        </a:rPr>
+                        <a:t>Rarely</a:t>
+                      </a:r>
+                    </a:p>
+                  </a:txBody>
+                  <a:tcPr marT="27432" marB="27432">
+                    <a:solidFill>
+                      <a:srgbClr val="FFFFFF"/>
+                    </a:solidFill>
+                  </a:tcPr>
+                </a:tc>
+                <a:tc>
+                  <a:txBody>
+                    <a:bodyPr/>
+                    <a:lstStyle/>
+                    <a:p>
+                      <a:r>
+                        <a:rPr sz="1500" b="0">
+                          <a:solidFill>
+                            <a:srgbClr val="444F5A"/>
+                          </a:solidFill>
+                          <a:latin typeface="Calibri"/>
+                        </a:rPr>
+                        <a:t>2</a:t>
+                      </a:r>
+                    </a:p>
+                  </a:txBody>
+                  <a:tcPr marT="27432" marB="27432">
+                    <a:solidFill>
+                      <a:srgbClr val="FFFFFF"/>
+                    </a:solidFill>
+                  </a:tcPr>
+                </a:tc>
+              </a:tr>
+              <a:tr h="365760">
+                <a:tc>
+                  <a:txBody>
+                    <a:bodyPr/>
+                    <a:lstStyle/>
+                    <a:p>
+                      <a:r>
+                        <a:rPr sz="1500" b="0">
+                          <a:solidFill>
+                            <a:srgbClr val="444F5A"/>
+                          </a:solidFill>
+                          <a:latin typeface="Calibri"/>
+                        </a:rPr>
+                        <a:t>About half the time I find it interesting.</a:t>
+                      </a:r>
+                    </a:p>
+                  </a:txBody>
+                  <a:tcPr marT="27432" marB="27432">
+                    <a:solidFill>
+                      <a:srgbClr val="F3F7FB"/>
+                    </a:solidFill>
+                  </a:tcPr>
+                </a:tc>
+                <a:tc>
+                  <a:txBody>
+                    <a:bodyPr/>
+                    <a:lstStyle/>
+                    <a:p>
+                      <a:r>
+                        <a:rPr sz="1500" b="1">
+                          <a:solidFill>
+                            <a:srgbClr val="444F5A"/>
+                          </a:solidFill>
+                          <a:latin typeface="Calibri"/>
+                        </a:rPr>
+                        <a:t>Sometimes</a:t>
+                      </a:r>
+                    </a:p>
+                  </a:txBody>
+                  <a:tcPr marT="27432" marB="27432">
+                    <a:solidFill>
+                      <a:srgbClr val="F3F7FB"/>
+                    </a:solidFill>
+                  </a:tcPr>
+                </a:tc>
+                <a:tc>
+                  <a:txBody>
+                    <a:bodyPr/>
+                    <a:lstStyle/>
+                    <a:p>
+                      <a:r>
+                        <a:rPr sz="1500" b="0">
+                          <a:solidFill>
+                            <a:srgbClr val="444F5A"/>
+                          </a:solidFill>
+                          <a:latin typeface="Calibri"/>
+                        </a:rPr>
+                        <a:t>3</a:t>
+                      </a:r>
+                    </a:p>
+                  </a:txBody>
+                  <a:tcPr marT="27432" marB="27432">
+                    <a:solidFill>
+                      <a:srgbClr val="F3F7FB"/>
+                    </a:solidFill>
+                  </a:tcPr>
+                </a:tc>
+              </a:tr>
+              <a:tr h="365760">
+                <a:tc>
+                  <a:txBody>
+                    <a:bodyPr/>
+                    <a:lstStyle/>
+                    <a:p>
+                      <a:r>
+                        <a:rPr sz="1500" b="0">
+                          <a:solidFill>
+                            <a:srgbClr val="444F5A"/>
+                          </a:solidFill>
+                          <a:latin typeface="Calibri"/>
+                        </a:rPr>
+                        <a:t>Most of the time it catches my attention.</a:t>
+                      </a:r>
+                    </a:p>
+                  </a:txBody>
+                  <a:tcPr marT="27432" marB="27432">
+                    <a:solidFill>
+                      <a:srgbClr val="FFFFFF"/>
+                    </a:solidFill>
+                  </a:tcPr>
+                </a:tc>
+                <a:tc>
+                  <a:txBody>
+                    <a:bodyPr/>
+                    <a:lstStyle/>
+                    <a:p>
+                      <a:r>
+                        <a:rPr sz="1500" b="1">
+                          <a:solidFill>
+                            <a:srgbClr val="444F5A"/>
+                          </a:solidFill>
+                          <a:latin typeface="Calibri"/>
+                        </a:rPr>
+                        <a:t>Often</a:t>
+                      </a:r>
+                    </a:p>
+                  </a:txBody>
+                  <a:tcPr marT="27432" marB="27432">
+                    <a:solidFill>
+                      <a:srgbClr val="FFFFFF"/>
+                    </a:solidFill>
+                  </a:tcPr>
+                </a:tc>
+                <a:tc>
+                  <a:txBody>
+                    <a:bodyPr/>
+                    <a:lstStyle/>
+                    <a:p>
+                      <a:r>
+                        <a:rPr sz="1500" b="0">
+                          <a:solidFill>
+                            <a:srgbClr val="444F5A"/>
+                          </a:solidFill>
+                          <a:latin typeface="Calibri"/>
+                        </a:rPr>
+                        <a:t>4</a:t>
+                      </a:r>
+                    </a:p>
+                  </a:txBody>
+                  <a:tcPr marT="27432" marB="27432">
+                    <a:solidFill>
+                      <a:srgbClr val="FFFFFF"/>
+                    </a:solidFill>
+                  </a:tcPr>
+                </a:tc>
+              </a:tr>
+              <a:tr h="365760">
+                <a:tc>
+                  <a:txBody>
+                    <a:bodyPr/>
+                    <a:lstStyle/>
+                    <a:p>
+                      <a:r>
+                        <a:rPr sz="1500" b="0">
+                          <a:solidFill>
+                            <a:srgbClr val="444F5A"/>
+                          </a:solidFill>
+                          <a:latin typeface="Calibri"/>
+                        </a:rPr>
+                        <a:t>It appeals to me every single time I see it.</a:t>
+                      </a:r>
+                    </a:p>
+                  </a:txBody>
+                  <a:tcPr marT="27432" marB="27432">
+                    <a:solidFill>
+                      <a:srgbClr val="F3F7FB"/>
+                    </a:solidFill>
+                  </a:tcPr>
+                </a:tc>
+                <a:tc>
+                  <a:txBody>
+                    <a:bodyPr/>
+                    <a:lstStyle/>
+                    <a:p>
+                      <a:r>
+                        <a:rPr sz="1500" b="1">
+                          <a:solidFill>
+                            <a:srgbClr val="444F5A"/>
+                          </a:solidFill>
+                          <a:latin typeface="Calibri"/>
+                        </a:rPr>
+                        <a:t>Always</a:t>
+                      </a:r>
+                    </a:p>
+                  </a:txBody>
+                  <a:tcPr marT="27432" marB="27432">
+                    <a:solidFill>
+                      <a:srgbClr val="F3F7FB"/>
+                    </a:solidFill>
+                  </a:tcPr>
+                </a:tc>
+                <a:tc>
+                  <a:txBody>
+                    <a:bodyPr/>
+                    <a:lstStyle/>
+                    <a:p>
+                      <a:r>
+                        <a:rPr sz="1500" b="0">
+                          <a:solidFill>
+                            <a:srgbClr val="444F5A"/>
+                          </a:solidFill>
+                          <a:latin typeface="Calibri"/>
+                        </a:rPr>
+                        <a:t>5</a:t>
+                      </a:r>
+                    </a:p>
+                  </a:txBody>
+                  <a:tcPr marT="27432" marB="27432">
+                    <a:solidFill>
+                      <a:srgbClr val="F3F7FB"/>
+                    </a:solidFill>
+                  </a:tcPr>
+                </a:tc>
+              </a:tr>
+            </a:tbl>
+          </a:graphicData>
+        </a:graphic>
+      </p:graphicFrame>
+      <p:sp>
+        <p:nvSpPr>
+          <p:cNvPr id="18" name="TextBox 17"/>
+          <p:cNvSpPr txBox="1"/>
+          <p:nvPr/>
+        </p:nvSpPr>
+        <p:spPr>
+          <a:xfrm>
+            <a:off x="640080" y="5852160"/>
+            <a:ext cx="10881360" cy="274320"/>
+          </a:xfrm>
+          <a:prstGeom prst="rect">
+            <a:avLst/>
+          </a:prstGeom>
+          <a:noFill/>
+        </p:spPr>
+        <p:txBody>
+          <a:bodyPr wrap="none">
+            <a:spAutoFit/>
+          </a:bodyPr>
+          <a:lstStyle/>
+          <a:p>
+            <a:r>
+              <a:rPr sz="1200" b="0">
                 <a:solidFill>
                   <a:srgbClr val="444F5A"/>
                 </a:solidFill>
                 <a:latin typeface="Calibri"/>
               </a:rPr>
-              <a:t>•  Cross join: every response x every engine</a:t>
-            </a:r>
-          </a:p>
-        </p:txBody>
-      </p:sp>
-      <p:sp>
-        <p:nvSpPr>
-          <p:cNvPr id="9" name="TextBox 8"/>
-          <p:cNvSpPr txBox="1"/>
-          <p:nvPr/>
-        </p:nvSpPr>
-        <p:spPr>
-          <a:xfrm>
-            <a:off x="640080" y="3657600"/>
-            <a:ext cx="10881360" cy="548640"/>
-          </a:xfrm>
-          <a:prstGeom prst="rect">
-            <a:avLst/>
-          </a:prstGeom>
-          <a:noFill/>
-        </p:spPr>
-        <p:txBody>
-          <a:bodyPr wrap="square">
-            <a:spAutoFit/>
-          </a:bodyPr>
-          <a:lstStyle/>
-          <a:p>
-            <a:pPr/>
-            <a:r>
-              <a:rPr sz="2200">
-                <a:solidFill>
-                  <a:srgbClr val="444F5A"/>
-                </a:solidFill>
-                <a:latin typeface="Calibri"/>
-              </a:rPr>
-              <a:t>•  Queue is a SAS table: inspect it before spending money</a:t>
+              <a:t>Phrases are from generate_survey_data.sas; the Bucket is the hidden true_bucket Claude must recover. reliability_score (0-1) comes back as a second number.</a:t>
             </a:r>
           </a:p>
         </p:txBody>
@@ -3800,7 +4634,7 @@
                 </a:solidFill>
                 <a:latin typeface="Calibri"/>
               </a:rPr>
-              <a:t>Step 2: the API call (02_run_requests.sas)</a:t>
+              <a:t>Step 1: build the request queue (01_prepare_requests.sas)</a:t>
             </a:r>
           </a:p>
         </p:txBody>
@@ -3848,7 +4682,7 @@
         <p:spPr>
           <a:xfrm>
             <a:off x="640080" y="1371600"/>
-            <a:ext cx="10881360" cy="2201875"/>
+            <a:ext cx="10881360" cy="1691640"/>
           </a:xfrm>
           <a:prstGeom prst="roundRect">
             <a:avLst>
@@ -3893,7 +4727,7 @@
         <p:spPr>
           <a:xfrm>
             <a:off x="822960" y="1463040"/>
-            <a:ext cx="10515600" cy="2018995"/>
+            <a:ext cx="10515600" cy="1508760"/>
           </a:xfrm>
           <a:prstGeom prst="rect">
             <a:avLst/>
@@ -3907,90 +4741,57 @@
           <a:lstStyle/>
           <a:p>
             <a:r>
-              <a:rPr sz="1400">
+              <a:rPr sz="1600">
                 <a:solidFill>
                   <a:srgbClr val="E6E6F0"/>
                 </a:solidFill>
                 <a:latin typeface="Consolas"/>
               </a:rPr>
-              <a:t>proc http method='POST' url="&amp;anthropic_api_url."</a:t>
-            </a:r>
-          </a:p>
-          <a:p>
-            <a:r>
-              <a:rPr sz="1400">
+              <a:t>create table proj.claude_requests as</a:t>
+            </a:r>
+          </a:p>
+          <a:p>
+            <a:r>
+              <a:rPr sz="1600">
                 <a:solidFill>
                   <a:srgbClr val="E6E6F0"/>
                 </a:solidFill>
                 <a:latin typeface="Consolas"/>
               </a:rPr>
-              <a:t>  in=reqbody out=resp;</a:t>
-            </a:r>
-          </a:p>
-          <a:p>
-            <a:r>
-              <a:rPr sz="1400">
+              <a:t>select monotonic() as request_id, e.engine_id, ...</a:t>
+            </a:r>
+          </a:p>
+          <a:p>
+            <a:r>
+              <a:rPr sz="1600">
                 <a:solidFill>
                   <a:srgbClr val="E6E6F0"/>
                 </a:solidFill>
                 <a:latin typeface="Consolas"/>
               </a:rPr>
-              <a:t>  headers</a:t>
-            </a:r>
-          </a:p>
-          <a:p>
-            <a:r>
-              <a:rPr sz="1400">
+              <a:t>       'PENDING' as status, ...</a:t>
+            </a:r>
+          </a:p>
+          <a:p>
+            <a:r>
+              <a:rPr sz="1600">
                 <a:solidFill>
                   <a:srgbClr val="E6E6F0"/>
                 </a:solidFill>
                 <a:latin typeface="Consolas"/>
               </a:rPr>
-              <a:t>    'x-api-key'="&amp;anthropic_api_key."</a:t>
-            </a:r>
-          </a:p>
-          <a:p>
-            <a:r>
-              <a:rPr sz="1400">
+              <a:t>from proj.claude_engines as e,</a:t>
+            </a:r>
+          </a:p>
+          <a:p>
+            <a:r>
+              <a:rPr sz="1600">
                 <a:solidFill>
                   <a:srgbClr val="E6E6F0"/>
                 </a:solidFill>
                 <a:latin typeface="Consolas"/>
               </a:rPr>
-              <a:t>    'anthropic-version'="&amp;anthropic_api_version."</a:t>
-            </a:r>
-          </a:p>
-          <a:p>
-            <a:r>
-              <a:rPr sz="1400">
-                <a:solidFill>
-                  <a:srgbClr val="E6E6F0"/>
-                </a:solidFill>
-                <a:latin typeface="Consolas"/>
-              </a:rPr>
-              <a:t>    'content-type'='application/json';</a:t>
-            </a:r>
-          </a:p>
-          <a:p>
-            <a:r>
-              <a:rPr sz="1400">
-                <a:solidFill>
-                  <a:srgbClr val="E6E6F0"/>
-                </a:solidFill>
-                <a:latin typeface="Consolas"/>
-              </a:rPr>
-              <a:t>run;</a:t>
-            </a:r>
-          </a:p>
-          <a:p>
-            <a:r>
-              <a:rPr sz="1400">
-                <a:solidFill>
-                  <a:srgbClr val="E6E6F0"/>
-                </a:solidFill>
-                <a:latin typeface="Consolas"/>
-              </a:rPr>
-              <a:t>%let http_status=&amp;SYS_PROCHTTP_STATUS_CODE.;</a:t>
+              <a:t>     proj.survey_responses(obs=&amp;max_responses.) as s;</a:t>
             </a:r>
           </a:p>
         </p:txBody>
@@ -4003,7 +4804,7 @@
         </p:nvSpPr>
         <p:spPr>
           <a:xfrm>
-            <a:off x="640080" y="3710635"/>
+            <a:off x="640080" y="3200400"/>
             <a:ext cx="10881360" cy="548640"/>
           </a:xfrm>
           <a:prstGeom prst="rect">
@@ -4025,17 +4826,34 @@
                 </a:solidFill>
                 <a:latin typeface="Calibri"/>
               </a:rPr>
-              <a:t>•  Body built in a </a:t>
-            </a:r>
-            <a:r>
-              <a:rPr sz="2200">
-                <a:solidFill>
-                  <a:srgbClr val="1F78C8"/>
-                </a:solidFill>
-                <a:latin typeface="Consolas"/>
-              </a:rPr>
-              <a:t>data _null_</a:t>
-            </a:r>
+              <a:t>•  Cross join: every response x every engine</a:t>
+            </a:r>
+          </a:p>
+        </p:txBody>
+      </p:sp>
+      <p:sp>
+        <p:nvSpPr>
+          <p:cNvPr id="9" name="TextBox 8"/>
+          <p:cNvSpPr txBox="1"/>
+          <p:nvPr/>
+        </p:nvSpPr>
+        <p:spPr>
+          <a:xfrm>
+            <a:off x="640080" y="3657600"/>
+            <a:ext cx="10881360" cy="548640"/>
+          </a:xfrm>
+          <a:prstGeom prst="rect">
+            <a:avLst/>
+          </a:prstGeom>
+          <a:noFill/>
+        </p:spPr>
+        <p:txBody>
+          <a:bodyPr wrap="square">
+            <a:spAutoFit/>
+          </a:bodyPr>
+          <a:lstStyle/>
+          <a:p>
+            <a:pPr/>
             <a:r>
               <a:rPr sz="2200">
                 <a:solidFill>
@@ -4043,60 +4861,7 @@
                 </a:solidFill>
                 <a:latin typeface="Calibri"/>
               </a:rPr>
-              <a:t> step, JSON-escaped (backslash first, then quotes, then newlines)</a:t>
-            </a:r>
-          </a:p>
-        </p:txBody>
-      </p:sp>
-      <p:sp>
-        <p:nvSpPr>
-          <p:cNvPr id="9" name="TextBox 8"/>
-          <p:cNvSpPr txBox="1"/>
-          <p:nvPr/>
-        </p:nvSpPr>
-        <p:spPr>
-          <a:xfrm>
-            <a:off x="640080" y="4625035"/>
-            <a:ext cx="10881360" cy="548640"/>
-          </a:xfrm>
-          <a:prstGeom prst="rect">
-            <a:avLst/>
-          </a:prstGeom>
-          <a:noFill/>
-        </p:spPr>
-        <p:txBody>
-          <a:bodyPr wrap="square">
-            <a:spAutoFit/>
-          </a:bodyPr>
-          <a:lstStyle/>
-          <a:p>
-            <a:pPr/>
-            <a:r>
-              <a:rPr sz="2200">
-                <a:solidFill>
-                  <a:srgbClr val="444F5A"/>
-                </a:solidFill>
-                <a:latin typeface="Calibri"/>
-              </a:rPr>
-              <a:t>•  Survey text stays in data rows, </a:t>
-            </a:r>
-            <a:r>
-              <a:rPr sz="2200" b="1">
-                <a:solidFill>
-                  <a:srgbClr val="444F5A"/>
-                </a:solidFill>
-                <a:latin typeface="Calibri"/>
-              </a:rPr>
-              <a:t>not macro parameters</a:t>
-            </a:r>
-            <a:r>
-              <a:rPr sz="2200">
-                <a:solidFill>
-                  <a:srgbClr val="444F5A"/>
-                </a:solidFill>
-                <a:latin typeface="Calibri"/>
-              </a:rPr>
-              <a:t>, so commas/quotes/ampersands can't break macro parsing</a:t>
+              <a:t>•  Queue is a SAS table: inspect it before spending money</a:t>
             </a:r>
           </a:p>
         </p:txBody>
@@ -4234,7 +4999,7 @@
                 </a:solidFill>
                 <a:latin typeface="Calibri"/>
               </a:rPr>
-              <a:t>Bounded, restartable batches</a:t>
+              <a:t>Step 2: the API call (02_run_requests.sas)</a:t>
             </a:r>
           </a:p>
         </p:txBody>
@@ -4275,13 +5040,169 @@
       </p:sp>
       <p:sp>
         <p:nvSpPr>
-          <p:cNvPr id="6" name="TextBox 5"/>
-          <p:cNvSpPr txBox="1"/>
+          <p:cNvPr id="6" name="Rounded Rectangle 5"/>
+          <p:cNvSpPr/>
           <p:nvPr/>
         </p:nvSpPr>
         <p:spPr>
           <a:xfrm>
             <a:off x="640080" y="1371600"/>
+            <a:ext cx="10881360" cy="2201875"/>
+          </a:xfrm>
+          <a:prstGeom prst="roundRect">
+            <a:avLst>
+              <a:gd name="adj" fmla="val 3000"/>
+            </a:avLst>
+          </a:prstGeom>
+          <a:solidFill>
+            <a:srgbClr val="1E1E2E"/>
+          </a:solidFill>
+          <a:ln>
+            <a:noFill/>
+          </a:ln>
+        </p:spPr>
+        <p:style>
+          <a:lnRef idx="1">
+            <a:schemeClr val="accent1"/>
+          </a:lnRef>
+          <a:fillRef idx="3">
+            <a:schemeClr val="accent1"/>
+          </a:fillRef>
+          <a:effectRef idx="2">
+            <a:schemeClr val="accent1"/>
+          </a:effectRef>
+          <a:fontRef idx="minor">
+            <a:schemeClr val="lt1"/>
+          </a:fontRef>
+        </p:style>
+        <p:txBody>
+          <a:bodyPr rtlCol="0" anchor="ctr"/>
+          <a:lstStyle/>
+          <a:p>
+            <a:pPr algn="ctr"/>
+          </a:p>
+        </p:txBody>
+      </p:sp>
+      <p:sp>
+        <p:nvSpPr>
+          <p:cNvPr id="7" name="TextBox 6"/>
+          <p:cNvSpPr txBox="1"/>
+          <p:nvPr/>
+        </p:nvSpPr>
+        <p:spPr>
+          <a:xfrm>
+            <a:off x="822960" y="1463040"/>
+            <a:ext cx="10515600" cy="2018995"/>
+          </a:xfrm>
+          <a:prstGeom prst="rect">
+            <a:avLst/>
+          </a:prstGeom>
+          <a:noFill/>
+        </p:spPr>
+        <p:txBody>
+          <a:bodyPr wrap="square">
+            <a:spAutoFit/>
+          </a:bodyPr>
+          <a:lstStyle/>
+          <a:p>
+            <a:r>
+              <a:rPr sz="1400">
+                <a:solidFill>
+                  <a:srgbClr val="E6E6F0"/>
+                </a:solidFill>
+                <a:latin typeface="Consolas"/>
+              </a:rPr>
+              <a:t>proc http method='POST' url="&amp;anthropic_api_url."</a:t>
+            </a:r>
+          </a:p>
+          <a:p>
+            <a:r>
+              <a:rPr sz="1400">
+                <a:solidFill>
+                  <a:srgbClr val="E6E6F0"/>
+                </a:solidFill>
+                <a:latin typeface="Consolas"/>
+              </a:rPr>
+              <a:t>  in=reqbody out=resp;</a:t>
+            </a:r>
+          </a:p>
+          <a:p>
+            <a:r>
+              <a:rPr sz="1400">
+                <a:solidFill>
+                  <a:srgbClr val="E6E6F0"/>
+                </a:solidFill>
+                <a:latin typeface="Consolas"/>
+              </a:rPr>
+              <a:t>  headers</a:t>
+            </a:r>
+          </a:p>
+          <a:p>
+            <a:r>
+              <a:rPr sz="1400">
+                <a:solidFill>
+                  <a:srgbClr val="E6E6F0"/>
+                </a:solidFill>
+                <a:latin typeface="Consolas"/>
+              </a:rPr>
+              <a:t>    'x-api-key'="&amp;anthropic_api_key."</a:t>
+            </a:r>
+          </a:p>
+          <a:p>
+            <a:r>
+              <a:rPr sz="1400">
+                <a:solidFill>
+                  <a:srgbClr val="E6E6F0"/>
+                </a:solidFill>
+                <a:latin typeface="Consolas"/>
+              </a:rPr>
+              <a:t>    'anthropic-version'="&amp;anthropic_api_version."</a:t>
+            </a:r>
+          </a:p>
+          <a:p>
+            <a:r>
+              <a:rPr sz="1400">
+                <a:solidFill>
+                  <a:srgbClr val="E6E6F0"/>
+                </a:solidFill>
+                <a:latin typeface="Consolas"/>
+              </a:rPr>
+              <a:t>    'content-type'='application/json';</a:t>
+            </a:r>
+          </a:p>
+          <a:p>
+            <a:r>
+              <a:rPr sz="1400">
+                <a:solidFill>
+                  <a:srgbClr val="E6E6F0"/>
+                </a:solidFill>
+                <a:latin typeface="Consolas"/>
+              </a:rPr>
+              <a:t>run;</a:t>
+            </a:r>
+          </a:p>
+          <a:p>
+            <a:r>
+              <a:rPr sz="1400">
+                <a:solidFill>
+                  <a:srgbClr val="E6E6F0"/>
+                </a:solidFill>
+                <a:latin typeface="Consolas"/>
+              </a:rPr>
+              <a:t>%let http_status=&amp;SYS_PROCHTTP_STATUS_CODE.;</a:t>
+            </a:r>
+          </a:p>
+        </p:txBody>
+      </p:sp>
+      <p:sp>
+        <p:nvSpPr>
+          <p:cNvPr id="8" name="TextBox 7"/>
+          <p:cNvSpPr txBox="1"/>
+          <p:nvPr/>
+        </p:nvSpPr>
+        <p:spPr>
+          <a:xfrm>
+            <a:off x="640080" y="3710635"/>
             <a:ext cx="10881360" cy="548640"/>
           </a:xfrm>
           <a:prstGeom prst="rect">
@@ -4303,7 +5224,7 @@
                 </a:solidFill>
                 <a:latin typeface="Calibri"/>
               </a:rPr>
-              <a:t>•  </a:t>
+              <a:t>•  Body built in a </a:t>
             </a:r>
             <a:r>
               <a:rPr sz="2200">
@@ -4312,7 +5233,7 @@
                 </a:solidFill>
                 <a:latin typeface="Consolas"/>
               </a:rPr>
-              <a:t>batch_size = 200</a:t>
+              <a:t>data _null_</a:t>
             </a:r>
             <a:r>
               <a:rPr sz="2200">
@@ -4321,29 +5242,20 @@
                 </a:solidFill>
                 <a:latin typeface="Calibri"/>
               </a:rPr>
-              <a:t>, </a:t>
-            </a:r>
-            <a:r>
-              <a:rPr sz="2200">
-                <a:solidFill>
-                  <a:srgbClr val="1F78C8"/>
-                </a:solidFill>
-                <a:latin typeface="Consolas"/>
-              </a:rPr>
-              <a:t>claude_max_tokens = 500</a:t>
-            </a:r>
-          </a:p>
-        </p:txBody>
-      </p:sp>
-      <p:sp>
-        <p:nvSpPr>
-          <p:cNvPr id="7" name="TextBox 6"/>
-          <p:cNvSpPr txBox="1"/>
-          <p:nvPr/>
-        </p:nvSpPr>
-        <p:spPr>
-          <a:xfrm>
-            <a:off x="640080" y="1828800"/>
+              <a:t> step, JSON-escaped (backslash first, then quotes, then newlines)</a:t>
+            </a:r>
+          </a:p>
+        </p:txBody>
+      </p:sp>
+      <p:sp>
+        <p:nvSpPr>
+          <p:cNvPr id="9" name="TextBox 8"/>
+          <p:cNvSpPr txBox="1"/>
+          <p:nvPr/>
+        </p:nvSpPr>
+        <p:spPr>
+          <a:xfrm>
+            <a:off x="640080" y="4625035"/>
             <a:ext cx="10881360" cy="548640"/>
           </a:xfrm>
           <a:prstGeom prst="rect">
@@ -4365,87 +5277,17 @@
                 </a:solidFill>
                 <a:latin typeface="Calibri"/>
               </a:rPr>
-              <a:t>•  Selects only </a:t>
-            </a:r>
-            <a:r>
-              <a:rPr sz="2200">
-                <a:solidFill>
-                  <a:srgbClr val="1F78C8"/>
-                </a:solidFill>
-                <a:latin typeface="Consolas"/>
-              </a:rPr>
-              <a:t>status='PENDING'</a:t>
-            </a:r>
-          </a:p>
-        </p:txBody>
-      </p:sp>
-      <p:sp>
-        <p:nvSpPr>
-          <p:cNvPr id="8" name="TextBox 7"/>
-          <p:cNvSpPr txBox="1"/>
-          <p:nvPr/>
-        </p:nvSpPr>
-        <p:spPr>
-          <a:xfrm>
-            <a:off x="640080" y="2286000"/>
-            <a:ext cx="10881360" cy="548640"/>
-          </a:xfrm>
-          <a:prstGeom prst="rect">
-            <a:avLst/>
-          </a:prstGeom>
-          <a:noFill/>
-        </p:spPr>
-        <p:txBody>
-          <a:bodyPr wrap="square">
-            <a:spAutoFit/>
-          </a:bodyPr>
-          <a:lstStyle/>
-          <a:p>
-            <a:pPr/>
-            <a:r>
-              <a:rPr sz="2200">
+              <a:t>•  Survey text stays in data rows, </a:t>
+            </a:r>
+            <a:r>
+              <a:rPr sz="2200" b="1">
                 <a:solidFill>
                   <a:srgbClr val="444F5A"/>
                 </a:solidFill>
                 <a:latin typeface="Calibri"/>
               </a:rPr>
-              <a:t>•  Each request logged to </a:t>
-            </a:r>
-            <a:r>
-              <a:rPr sz="2200">
-                <a:solidFill>
-                  <a:srgbClr val="1F78C8"/>
-                </a:solidFill>
-                <a:latin typeface="Consolas"/>
-              </a:rPr>
-              <a:t>proj.claude_http_log</a:t>
-            </a:r>
-          </a:p>
-        </p:txBody>
-      </p:sp>
-      <p:sp>
-        <p:nvSpPr>
-          <p:cNvPr id="9" name="TextBox 8"/>
-          <p:cNvSpPr txBox="1"/>
-          <p:nvPr/>
-        </p:nvSpPr>
-        <p:spPr>
-          <a:xfrm>
-            <a:off x="640080" y="2743200"/>
-            <a:ext cx="10881360" cy="548640"/>
-          </a:xfrm>
-          <a:prstGeom prst="rect">
-            <a:avLst/>
-          </a:prstGeom>
-          <a:noFill/>
-        </p:spPr>
-        <p:txBody>
-          <a:bodyPr wrap="square">
-            <a:spAutoFit/>
-          </a:bodyPr>
-          <a:lstStyle/>
-          <a:p>
-            <a:pPr/>
+              <a:t>not macro parameters</a:t>
+            </a:r>
             <a:r>
               <a:rPr sz="2200">
                 <a:solidFill>
@@ -4453,123 +5295,7 @@
                 </a:solidFill>
                 <a:latin typeface="Calibri"/>
               </a:rPr>
-              <a:t>•  Queue row updated: </a:t>
-            </a:r>
-            <a:r>
-              <a:rPr sz="2200">
-                <a:solidFill>
-                  <a:srgbClr val="1F78C8"/>
-                </a:solidFill>
-                <a:latin typeface="Consolas"/>
-              </a:rPr>
-              <a:t>RECEIVED</a:t>
-            </a:r>
-            <a:r>
-              <a:rPr sz="2200">
-                <a:solidFill>
-                  <a:srgbClr val="444F5A"/>
-                </a:solidFill>
-                <a:latin typeface="Calibri"/>
-              </a:rPr>
-              <a:t> or </a:t>
-            </a:r>
-            <a:r>
-              <a:rPr sz="2200">
-                <a:solidFill>
-                  <a:srgbClr val="1F78C8"/>
-                </a:solidFill>
-                <a:latin typeface="Consolas"/>
-              </a:rPr>
-              <a:t>ERROR</a:t>
-            </a:r>
-            <a:r>
-              <a:rPr sz="2200">
-                <a:solidFill>
-                  <a:srgbClr val="444F5A"/>
-                </a:solidFill>
-                <a:latin typeface="Calibri"/>
-              </a:rPr>
-              <a:t>, with </a:t>
-            </a:r>
-            <a:r>
-              <a:rPr sz="2200">
-                <a:solidFill>
-                  <a:srgbClr val="1F78C8"/>
-                </a:solidFill>
-                <a:latin typeface="Consolas"/>
-              </a:rPr>
-              <a:t>http_status</a:t>
-            </a:r>
-            <a:r>
-              <a:rPr sz="2200">
-                <a:solidFill>
-                  <a:srgbClr val="444F5A"/>
-                </a:solidFill>
-                <a:latin typeface="Calibri"/>
-              </a:rPr>
-              <a:t>, </a:t>
-            </a:r>
-            <a:r>
-              <a:rPr sz="2200">
-                <a:solidFill>
-                  <a:srgbClr val="1F78C8"/>
-                </a:solidFill>
-                <a:latin typeface="Consolas"/>
-              </a:rPr>
-              <a:t>raw_response</a:t>
-            </a:r>
-            <a:r>
-              <a:rPr sz="2200">
-                <a:solidFill>
-                  <a:srgbClr val="444F5A"/>
-                </a:solidFill>
-                <a:latin typeface="Calibri"/>
-              </a:rPr>
-              <a:t>, </a:t>
-            </a:r>
-            <a:r>
-              <a:rPr sz="2200">
-                <a:solidFill>
-                  <a:srgbClr val="1F78C8"/>
-                </a:solidFill>
-                <a:latin typeface="Consolas"/>
-              </a:rPr>
-              <a:t>completed_at</a:t>
-            </a:r>
-          </a:p>
-        </p:txBody>
-      </p:sp>
-      <p:sp>
-        <p:nvSpPr>
-          <p:cNvPr id="10" name="TextBox 9"/>
-          <p:cNvSpPr txBox="1"/>
-          <p:nvPr/>
-        </p:nvSpPr>
-        <p:spPr>
-          <a:xfrm>
-            <a:off x="640080" y="3200400"/>
-            <a:ext cx="10881360" cy="548640"/>
-          </a:xfrm>
-          <a:prstGeom prst="rect">
-            <a:avLst/>
-          </a:prstGeom>
-          <a:noFill/>
-        </p:spPr>
-        <p:txBody>
-          <a:bodyPr wrap="square">
-            <a:spAutoFit/>
-          </a:bodyPr>
-          <a:lstStyle/>
-          <a:p>
-            <a:pPr/>
-            <a:r>
-              <a:rPr sz="2200">
-                <a:solidFill>
-                  <a:srgbClr val="444F5A"/>
-                </a:solidFill>
-                <a:latin typeface="Calibri"/>
-              </a:rPr>
-              <a:t>•  Rerun to continue where you left off</a:t>
+              <a:t>, so commas/quotes/ampersands can't break macro parsing</a:t>
             </a:r>
           </a:p>
         </p:txBody>
@@ -4707,7 +5433,7 @@
                 </a:solidFill>
                 <a:latin typeface="Calibri"/>
               </a:rPr>
-              <a:t>Step 3: parse (03_parse_requests.sas)</a:t>
+              <a:t>Bounded, restartable batches</a:t>
             </a:r>
           </a:p>
         </p:txBody>
@@ -4776,7 +5502,7 @@
                 </a:solidFill>
                 <a:latin typeface="Calibri"/>
               </a:rPr>
-              <a:t>•  Only </a:t>
+              <a:t>•  </a:t>
             </a:r>
             <a:r>
               <a:rPr sz="2200">
@@ -4785,7 +5511,7 @@
                 </a:solidFill>
                 <a:latin typeface="Consolas"/>
               </a:rPr>
-              <a:t>RECEIVED</a:t>
+              <a:t>batch_size = 200</a:t>
             </a:r>
             <a:r>
               <a:rPr sz="2200">
@@ -4794,7 +5520,16 @@
                 </a:solidFill>
                 <a:latin typeface="Calibri"/>
               </a:rPr>
-              <a:t> rows are parsed</a:t>
+              <a:t>, </a:t>
+            </a:r>
+            <a:r>
+              <a:rPr sz="2200">
+                <a:solidFill>
+                  <a:srgbClr val="1F78C8"/>
+                </a:solidFill>
+                <a:latin typeface="Consolas"/>
+              </a:rPr>
+              <a:t>claude_max_tokens = 500</a:t>
             </a:r>
           </a:p>
         </p:txBody>
@@ -4829,7 +5564,7 @@
                 </a:solidFill>
                 <a:latin typeface="Calibri"/>
               </a:rPr>
-              <a:t>•  </a:t>
+              <a:t>•  Selects only </a:t>
             </a:r>
             <a:r>
               <a:rPr sz="2200">
@@ -4838,16 +5573,7 @@
                 </a:solidFill>
                 <a:latin typeface="Consolas"/>
               </a:rPr>
-              <a:t>PRXPARSE</a:t>
-            </a:r>
-            <a:r>
-              <a:rPr sz="2200">
-                <a:solidFill>
-                  <a:srgbClr val="444F5A"/>
-                </a:solidFill>
-                <a:latin typeface="Calibri"/>
-              </a:rPr>
-              <a:t> pulls the model's text out of the response envelope</a:t>
+              <a:t>status='PENDING'</a:t>
             </a:r>
           </a:p>
         </p:txBody>
@@ -4882,7 +5608,7 @@
                 </a:solidFill>
                 <a:latin typeface="Calibri"/>
               </a:rPr>
-              <a:t>•  </a:t>
+              <a:t>•  Each request logged to </a:t>
             </a:r>
             <a:r>
               <a:rPr sz="2200">
@@ -4891,8 +5617,34 @@
                 </a:solidFill>
                 <a:latin typeface="Consolas"/>
               </a:rPr>
-              <a:t>json_field()</a:t>
-            </a:r>
+              <a:t>proj.claude_http_log</a:t>
+            </a:r>
+          </a:p>
+        </p:txBody>
+      </p:sp>
+      <p:sp>
+        <p:nvSpPr>
+          <p:cNvPr id="9" name="TextBox 8"/>
+          <p:cNvSpPr txBox="1"/>
+          <p:nvPr/>
+        </p:nvSpPr>
+        <p:spPr>
+          <a:xfrm>
+            <a:off x="640080" y="2743200"/>
+            <a:ext cx="10881360" cy="548640"/>
+          </a:xfrm>
+          <a:prstGeom prst="rect">
+            <a:avLst/>
+          </a:prstGeom>
+          <a:noFill/>
+        </p:spPr>
+        <p:txBody>
+          <a:bodyPr wrap="square">
+            <a:spAutoFit/>
+          </a:bodyPr>
+          <a:lstStyle/>
+          <a:p>
+            <a:pPr/>
             <a:r>
               <a:rPr sz="2200">
                 <a:solidFill>
@@ -4900,7 +5652,7 @@
                 </a:solidFill>
                 <a:latin typeface="Calibri"/>
               </a:rPr>
-              <a:t> (FCMP in </a:t>
+              <a:t>•  Queue row updated: </a:t>
             </a:r>
             <a:r>
               <a:rPr sz="2200">
@@ -4909,7 +5661,7 @@
                 </a:solidFill>
                 <a:latin typeface="Consolas"/>
               </a:rPr>
-              <a:t>99_utils/extract_json.sas</a:t>
+              <a:t>RECEIVED</a:t>
             </a:r>
             <a:r>
               <a:rPr sz="2200">
@@ -4918,7 +5670,7 @@
                 </a:solidFill>
                 <a:latin typeface="Calibri"/>
               </a:rPr>
-              <a:t>) extracts </a:t>
+              <a:t> or </a:t>
             </a:r>
             <a:r>
               <a:rPr sz="2200">
@@ -4927,7 +5679,7 @@
                 </a:solidFill>
                 <a:latin typeface="Consolas"/>
               </a:rPr>
-              <a:t>decision</a:t>
+              <a:t>ERROR</a:t>
             </a:r>
             <a:r>
               <a:rPr sz="2200">
@@ -4936,7 +5688,7 @@
                 </a:solidFill>
                 <a:latin typeface="Calibri"/>
               </a:rPr>
-              <a:t> and </a:t>
+              <a:t>, with </a:t>
             </a:r>
             <a:r>
               <a:rPr sz="2200">
@@ -4945,14 +5697,50 @@
                 </a:solidFill>
                 <a:latin typeface="Consolas"/>
               </a:rPr>
-              <a:t>reliability_score</a:t>
-            </a:r>
-          </a:p>
-        </p:txBody>
-      </p:sp>
-      <p:sp>
-        <p:nvSpPr>
-          <p:cNvPr id="9" name="TextBox 8"/>
+              <a:t>http_status</a:t>
+            </a:r>
+            <a:r>
+              <a:rPr sz="2200">
+                <a:solidFill>
+                  <a:srgbClr val="444F5A"/>
+                </a:solidFill>
+                <a:latin typeface="Calibri"/>
+              </a:rPr>
+              <a:t>, </a:t>
+            </a:r>
+            <a:r>
+              <a:rPr sz="2200">
+                <a:solidFill>
+                  <a:srgbClr val="1F78C8"/>
+                </a:solidFill>
+                <a:latin typeface="Consolas"/>
+              </a:rPr>
+              <a:t>raw_response</a:t>
+            </a:r>
+            <a:r>
+              <a:rPr sz="2200">
+                <a:solidFill>
+                  <a:srgbClr val="444F5A"/>
+                </a:solidFill>
+                <a:latin typeface="Calibri"/>
+              </a:rPr>
+              <a:t>, </a:t>
+            </a:r>
+            <a:r>
+              <a:rPr sz="2200">
+                <a:solidFill>
+                  <a:srgbClr val="1F78C8"/>
+                </a:solidFill>
+                <a:latin typeface="Consolas"/>
+              </a:rPr>
+              <a:t>completed_at</a:t>
+            </a:r>
+          </a:p>
+        </p:txBody>
+      </p:sp>
+      <p:sp>
+        <p:nvSpPr>
+          <p:cNvPr id="10" name="TextBox 9"/>
           <p:cNvSpPr txBox="1"/>
           <p:nvPr/>
         </p:nvSpPr>
@@ -4980,69 +5768,7 @@
                 </a:solidFill>
                 <a:latin typeface="Calibri"/>
               </a:rPr>
-              <a:t>•  Bad output becomes </a:t>
-            </a:r>
-            <a:r>
-              <a:rPr sz="2200">
-                <a:solidFill>
-                  <a:srgbClr val="1F78C8"/>
-                </a:solidFill>
-                <a:latin typeface="Consolas"/>
-              </a:rPr>
-              <a:t>PARSE_ERROR</a:t>
-            </a:r>
-            <a:r>
-              <a:rPr sz="2200">
-                <a:solidFill>
-                  <a:srgbClr val="444F5A"/>
-                </a:solidFill>
-                <a:latin typeface="Calibri"/>
-              </a:rPr>
-              <a:t>, never a misleading result</a:t>
-            </a:r>
-          </a:p>
-        </p:txBody>
-      </p:sp>
-      <p:sp>
-        <p:nvSpPr>
-          <p:cNvPr id="10" name="TextBox 9"/>
-          <p:cNvSpPr txBox="1"/>
-          <p:nvPr/>
-        </p:nvSpPr>
-        <p:spPr>
-          <a:xfrm>
-            <a:off x="640080" y="3657600"/>
-            <a:ext cx="10881360" cy="548640"/>
-          </a:xfrm>
-          <a:prstGeom prst="rect">
-            <a:avLst/>
-          </a:prstGeom>
-          <a:noFill/>
-        </p:spPr>
-        <p:txBody>
-          <a:bodyPr wrap="square">
-            <a:spAutoFit/>
-          </a:bodyPr>
-          <a:lstStyle/>
-          <a:p>
-            <a:pPr/>
-            <a:r>
-              <a:rPr sz="2200">
-                <a:solidFill>
-                  <a:srgbClr val="444F5A"/>
-                </a:solidFill>
-                <a:latin typeface="Calibri"/>
-              </a:rPr>
-              <a:t>•  HTTP errors stay visible in </a:t>
-            </a:r>
-            <a:r>
-              <a:rPr sz="2200">
-                <a:solidFill>
-                  <a:srgbClr val="1F78C8"/>
-                </a:solidFill>
-                <a:latin typeface="Consolas"/>
-              </a:rPr>
-              <a:t>proj.claude_requests</a:t>
+              <a:t>•  Rerun to continue where you left off</a:t>
             </a:r>
           </a:p>
         </p:txBody>
@@ -5180,7 +5906,7 @@
                 </a:solidFill>
                 <a:latin typeface="Calibri"/>
               </a:rPr>
-              <a:t>Comparing engines: accuracy</a:t>
+              <a:t>Step 3: parse (03_parse_requests.sas)</a:t>
             </a:r>
           </a:p>
         </p:txBody>
@@ -5241,6 +5967,16 @@
           </a:bodyPr>
           <a:lstStyle/>
           <a:p>
+            <a:pPr/>
+            <a:r>
+              <a:rPr sz="2200">
+                <a:solidFill>
+                  <a:srgbClr val="444F5A"/>
+                </a:solidFill>
+                <a:latin typeface="Calibri"/>
+              </a:rPr>
+              <a:t>•  Only </a:t>
+            </a:r>
             <a:r>
               <a:rPr sz="2200">
                 <a:solidFill>
@@ -5248,7 +5984,16 @@
                 </a:solidFill>
                 <a:latin typeface="Consolas"/>
               </a:rPr>
-              <a:t>03_analyze_results/01_compare_engines.sas</a:t>
+              <a:t>RECEIVED</a:t>
+            </a:r>
+            <a:r>
+              <a:rPr sz="2200">
+                <a:solidFill>
+                  <a:srgbClr val="444F5A"/>
+                </a:solidFill>
+                <a:latin typeface="Calibri"/>
+              </a:rPr>
+              <a:t> rows are parsed</a:t>
             </a:r>
           </a:p>
         </p:txBody>
@@ -5283,7 +6028,7 @@
                 </a:solidFill>
                 <a:latin typeface="Calibri"/>
               </a:rPr>
-              <a:t>•  Scores each engine's decision vs. hidden </a:t>
+              <a:t>•  </a:t>
             </a:r>
             <a:r>
               <a:rPr sz="2200">
@@ -5292,7 +6037,16 @@
                 </a:solidFill>
                 <a:latin typeface="Consolas"/>
               </a:rPr>
-              <a:t>true_bucket</a:t>
+              <a:t>PRXPARSE</a:t>
+            </a:r>
+            <a:r>
+              <a:rPr sz="2200">
+                <a:solidFill>
+                  <a:srgbClr val="444F5A"/>
+                </a:solidFill>
+                <a:latin typeface="Calibri"/>
+              </a:rPr>
+              <a:t> pulls the model's text out of the response envelope</a:t>
             </a:r>
           </a:p>
         </p:txBody>
@@ -5327,7 +6081,7 @@
                 </a:solidFill>
                 <a:latin typeface="Calibri"/>
               </a:rPr>
-              <a:t>•  Ordinal rank format (</a:t>
+              <a:t>•  </a:t>
             </a:r>
             <a:r>
               <a:rPr sz="2200">
@@ -5336,7 +6090,7 @@
                 </a:solidFill>
                 <a:latin typeface="Consolas"/>
               </a:rPr>
-              <a:t>bucket_rank</a:t>
+              <a:t>json_field()</a:t>
             </a:r>
             <a:r>
               <a:rPr sz="2200">
@@ -5345,7 +6099,52 @@
                 </a:solidFill>
                 <a:latin typeface="Calibri"/>
               </a:rPr>
-              <a:t>): Often vs Always is a smaller miss than Never vs Always</a:t>
+              <a:t> (FCMP in </a:t>
+            </a:r>
+            <a:r>
+              <a:rPr sz="2200">
+                <a:solidFill>
+                  <a:srgbClr val="1F78C8"/>
+                </a:solidFill>
+                <a:latin typeface="Consolas"/>
+              </a:rPr>
+              <a:t>99_utils/extract_json.sas</a:t>
+            </a:r>
+            <a:r>
+              <a:rPr sz="2200">
+                <a:solidFill>
+                  <a:srgbClr val="444F5A"/>
+                </a:solidFill>
+                <a:latin typeface="Calibri"/>
+              </a:rPr>
+              <a:t>) extracts </a:t>
+            </a:r>
+            <a:r>
+              <a:rPr sz="2200">
+                <a:solidFill>
+                  <a:srgbClr val="1F78C8"/>
+                </a:solidFill>
+                <a:latin typeface="Consolas"/>
+              </a:rPr>
+              <a:t>decision</a:t>
+            </a:r>
+            <a:r>
+              <a:rPr sz="2200">
+                <a:solidFill>
+                  <a:srgbClr val="444F5A"/>
+                </a:solidFill>
+                <a:latin typeface="Calibri"/>
+              </a:rPr>
+              <a:t> and </a:t>
+            </a:r>
+            <a:r>
+              <a:rPr sz="2200">
+                <a:solidFill>
+                  <a:srgbClr val="1F78C8"/>
+                </a:solidFill>
+                <a:latin typeface="Consolas"/>
+              </a:rPr>
+              <a:t>reliability_score</a:t>
             </a:r>
           </a:p>
         </p:txBody>
@@ -5353,59 +6152,6 @@
       <p:sp>
         <p:nvSpPr>
           <p:cNvPr id="9" name="TextBox 8"/>
-          <p:cNvSpPr txBox="1"/>
-          <p:nvPr/>
-        </p:nvSpPr>
-        <p:spPr>
-          <a:xfrm>
-            <a:off x="640080" y="2743200"/>
-            <a:ext cx="10881360" cy="548640"/>
-          </a:xfrm>
-          <a:prstGeom prst="rect">
-            <a:avLst/>
-          </a:prstGeom>
-          <a:noFill/>
-        </p:spPr>
-        <p:txBody>
-          <a:bodyPr wrap="square">
-            <a:spAutoFit/>
-          </a:bodyPr>
-          <a:lstStyle/>
-          <a:p>
-            <a:pPr/>
-            <a:r>
-              <a:rPr sz="2200">
-                <a:solidFill>
-                  <a:srgbClr val="444F5A"/>
-                </a:solidFill>
-                <a:latin typeface="Calibri"/>
-              </a:rPr>
-              <a:t>•  Does the self-reported </a:t>
-            </a:r>
-            <a:r>
-              <a:rPr sz="2200">
-                <a:solidFill>
-                  <a:srgbClr val="1F78C8"/>
-                </a:solidFill>
-                <a:latin typeface="Consolas"/>
-              </a:rPr>
-              <a:t>reliability_score</a:t>
-            </a:r>
-            <a:r>
-              <a:rPr sz="2200">
-                <a:solidFill>
-                  <a:srgbClr val="444F5A"/>
-                </a:solidFill>
-                <a:latin typeface="Calibri"/>
-              </a:rPr>
-              <a:t> track real accuracy?</a:t>
-            </a:r>
-          </a:p>
-        </p:txBody>
-      </p:sp>
-      <p:sp>
-        <p:nvSpPr>
-          <p:cNvPr id="10" name="TextBox 9"/>
           <p:cNvSpPr txBox="1"/>
           <p:nvPr/>
         </p:nvSpPr>
@@ -5433,7 +6179,7 @@
                 </a:solidFill>
                 <a:latin typeface="Calibri"/>
               </a:rPr>
-              <a:t>•  Output: </a:t>
+              <a:t>•  Bad output becomes </a:t>
             </a:r>
             <a:r>
               <a:rPr sz="2200">
@@ -5442,7 +6188,7 @@
                 </a:solidFill>
                 <a:latin typeface="Consolas"/>
               </a:rPr>
-              <a:t>proj.engine_scorecard</a:t>
+              <a:t>PARSE_ERROR</a:t>
             </a:r>
             <a:r>
               <a:rPr sz="2200">
@@ -5451,14 +6197,14 @@
                 </a:solidFill>
                 <a:latin typeface="Calibri"/>
               </a:rPr>
-              <a:t>, reports, accuracy vs. avg reliability bar chart</a:t>
-            </a:r>
-          </a:p>
-        </p:txBody>
-      </p:sp>
-      <p:sp>
-        <p:nvSpPr>
-          <p:cNvPr id="11" name="TextBox 10"/>
+              <a:t>, never a misleading result</a:t>
+            </a:r>
+          </a:p>
+        </p:txBody>
+      </p:sp>
+      <p:sp>
+        <p:nvSpPr>
+          <p:cNvPr id="10" name="TextBox 9"/>
           <p:cNvSpPr txBox="1"/>
           <p:nvPr/>
         </p:nvSpPr>
@@ -5478,6 +6224,16 @@
           </a:bodyPr>
           <a:lstStyle/>
           <a:p>
+            <a:pPr/>
+            <a:r>
+              <a:rPr sz="2200">
+                <a:solidFill>
+                  <a:srgbClr val="444F5A"/>
+                </a:solidFill>
+                <a:latin typeface="Calibri"/>
+              </a:rPr>
+              <a:t>•  HTTP errors stay visible in </a:t>
+            </a:r>
             <a:r>
               <a:rPr sz="2200">
                 <a:solidFill>
@@ -5485,16 +6241,7 @@
                 </a:solidFill>
                 <a:latin typeface="Consolas"/>
               </a:rPr>
-              <a:t>02_question_by_engine.sas</a:t>
-            </a:r>
-            <a:r>
-              <a:rPr sz="2200">
-                <a:solidFill>
-                  <a:srgbClr val="0B2A4A"/>
-                </a:solidFill>
-                <a:latin typeface="Calibri"/>
-              </a:rPr>
-              <a:t>: one row per question, each engine's answer side by side.</a:t>
+              <a:t>proj.claude_requests</a:t>
             </a:r>
           </a:p>
         </p:txBody>
@@ -5632,7 +6379,7 @@
                 </a:solidFill>
                 <a:latin typeface="Calibri"/>
               </a:rPr>
-              <a:t>Statistical rigor (04_statistical_tests.sas)</a:t>
+              <a:t>Comparing engines: accuracy</a:t>
             </a:r>
           </a:p>
         </p:txBody>
@@ -5693,15 +6440,14 @@
           </a:bodyPr>
           <a:lstStyle/>
           <a:p>
-            <a:pPr/>
-            <a:r>
-              <a:rPr sz="2200">
-                <a:solidFill>
-                  <a:srgbClr val="444F5A"/>
-                </a:solidFill>
-                <a:latin typeface="Calibri"/>
-              </a:rPr>
-              <a:t>1. Cochran's Q: paired differences in accuracy across engines</a:t>
+            <a:r>
+              <a:rPr sz="2200">
+                <a:solidFill>
+                  <a:srgbClr val="1F78C8"/>
+                </a:solidFill>
+                <a:latin typeface="Consolas"/>
+              </a:rPr>
+              <a:t>03_analyze_results/01_compare_engines.sas</a:t>
             </a:r>
           </a:p>
         </p:txBody>
@@ -5736,7 +6482,16 @@
                 </a:solidFill>
                 <a:latin typeface="Calibri"/>
               </a:rPr>
-              <a:t>2. Brier score: calibration of stated confidence</a:t>
+              <a:t>•  Scores each engine's decision vs. hidden </a:t>
+            </a:r>
+            <a:r>
+              <a:rPr sz="2200">
+                <a:solidFill>
+                  <a:srgbClr val="1F78C8"/>
+                </a:solidFill>
+                <a:latin typeface="Consolas"/>
+              </a:rPr>
+              <a:t>true_bucket</a:t>
             </a:r>
           </a:p>
         </p:txBody>
@@ -5771,7 +6526,25 @@
                 </a:solidFill>
                 <a:latin typeface="Calibri"/>
               </a:rPr>
-              <a:t>3. Reliability bins: stated confidence vs. observed accuracy</a:t>
+              <a:t>•  Ordinal rank format (</a:t>
+            </a:r>
+            <a:r>
+              <a:rPr sz="2200">
+                <a:solidFill>
+                  <a:srgbClr val="1F78C8"/>
+                </a:solidFill>
+                <a:latin typeface="Consolas"/>
+              </a:rPr>
+              <a:t>bucket_rank</a:t>
+            </a:r>
+            <a:r>
+              <a:rPr sz="2200">
+                <a:solidFill>
+                  <a:srgbClr val="444F5A"/>
+                </a:solidFill>
+                <a:latin typeface="Calibri"/>
+              </a:rPr>
+              <a:t>): Often vs Always is a smaller miss than Never vs Always</a:t>
             </a:r>
           </a:p>
         </p:txBody>
@@ -5806,7 +6579,7 @@
                 </a:solidFill>
                 <a:latin typeface="Calibri"/>
               </a:rPr>
-              <a:t>4. </a:t>
+              <a:t>•  Does the self-reported </a:t>
             </a:r>
             <a:r>
               <a:rPr sz="2200">
@@ -5815,7 +6588,7 @@
                 </a:solidFill>
                 <a:latin typeface="Consolas"/>
               </a:rPr>
-              <a:t>PROC FREQ AGREE</a:t>
+              <a:t>reliability_score</a:t>
             </a:r>
             <a:r>
               <a:rPr sz="2200">
@@ -5824,7 +6597,7 @@
                 </a:solidFill>
                 <a:latin typeface="Calibri"/>
               </a:rPr>
-              <a:t>: weighted kappa for ordinal agreement</a:t>
+              <a:t> track real accuracy?</a:t>
             </a:r>
           </a:p>
         </p:txBody>
@@ -5851,6 +6624,68 @@
           </a:bodyPr>
           <a:lstStyle/>
           <a:p>
+            <a:pPr/>
+            <a:r>
+              <a:rPr sz="2200">
+                <a:solidFill>
+                  <a:srgbClr val="444F5A"/>
+                </a:solidFill>
+                <a:latin typeface="Calibri"/>
+              </a:rPr>
+              <a:t>•  Output: </a:t>
+            </a:r>
+            <a:r>
+              <a:rPr sz="2200">
+                <a:solidFill>
+                  <a:srgbClr val="1F78C8"/>
+                </a:solidFill>
+                <a:latin typeface="Consolas"/>
+              </a:rPr>
+              <a:t>proj.engine_scorecard</a:t>
+            </a:r>
+            <a:r>
+              <a:rPr sz="2200">
+                <a:solidFill>
+                  <a:srgbClr val="444F5A"/>
+                </a:solidFill>
+                <a:latin typeface="Calibri"/>
+              </a:rPr>
+              <a:t>, reports, accuracy vs. avg reliability bar chart</a:t>
+            </a:r>
+          </a:p>
+        </p:txBody>
+      </p:sp>
+      <p:sp>
+        <p:nvSpPr>
+          <p:cNvPr id="11" name="TextBox 10"/>
+          <p:cNvSpPr txBox="1"/>
+          <p:nvPr/>
+        </p:nvSpPr>
+        <p:spPr>
+          <a:xfrm>
+            <a:off x="640080" y="3657600"/>
+            <a:ext cx="10881360" cy="548640"/>
+          </a:xfrm>
+          <a:prstGeom prst="rect">
+            <a:avLst/>
+          </a:prstGeom>
+          <a:noFill/>
+        </p:spPr>
+        <p:txBody>
+          <a:bodyPr wrap="square">
+            <a:spAutoFit/>
+          </a:bodyPr>
+          <a:lstStyle/>
+          <a:p>
+            <a:r>
+              <a:rPr sz="2200">
+                <a:solidFill>
+                  <a:srgbClr val="1F78C8"/>
+                </a:solidFill>
+                <a:latin typeface="Consolas"/>
+              </a:rPr>
+              <a:t>02_question_by_engine.sas</a:t>
+            </a:r>
             <a:r>
               <a:rPr sz="2200">
                 <a:solidFill>
@@ -5858,52 +6693,7 @@
                 </a:solidFill>
                 <a:latin typeface="Calibri"/>
               </a:rPr>
-              <a:t>Outputs: </a:t>
-            </a:r>
-            <a:r>
-              <a:rPr sz="2200">
-                <a:solidFill>
-                  <a:srgbClr val="1F78C8"/>
-                </a:solidFill>
-                <a:latin typeface="Consolas"/>
-              </a:rPr>
-              <a:t>proj.brier_scorecard</a:t>
-            </a:r>
-            <a:r>
-              <a:rPr sz="2200">
-                <a:solidFill>
-                  <a:srgbClr val="0B2A4A"/>
-                </a:solidFill>
-                <a:latin typeface="Calibri"/>
-              </a:rPr>
-              <a:t>, </a:t>
-            </a:r>
-            <a:r>
-              <a:rPr sz="2200">
-                <a:solidFill>
-                  <a:srgbClr val="1F78C8"/>
-                </a:solidFill>
-                <a:latin typeface="Consolas"/>
-              </a:rPr>
-              <a:t>proj.reliability_bins</a:t>
-            </a:r>
-            <a:r>
-              <a:rPr sz="2200">
-                <a:solidFill>
-                  <a:srgbClr val="0B2A4A"/>
-                </a:solidFill>
-                <a:latin typeface="Calibri"/>
-              </a:rPr>
-              <a:t>, </a:t>
-            </a:r>
-            <a:r>
-              <a:rPr sz="2200">
-                <a:solidFill>
-                  <a:srgbClr val="1F78C8"/>
-                </a:solidFill>
-                <a:latin typeface="Consolas"/>
-              </a:rPr>
-              <a:t>proj.cochran_q_result</a:t>
+              <a:t>: one row per question, each engine's answer side by side.</a:t>
             </a:r>
           </a:p>
         </p:txBody>
@@ -6041,7 +6831,7 @@
                 </a:solidFill>
                 <a:latin typeface="Calibri"/>
               </a:rPr>
-              <a:t>Costing: what the API returns</a:t>
+              <a:t>Statistical rigor (04_statistical_tests.sas)</a:t>
             </a:r>
           </a:p>
         </p:txBody>
@@ -6102,14 +6892,15 @@
           </a:bodyPr>
           <a:lstStyle/>
           <a:p>
-            <a:r>
-              <a:rPr sz="2200">
-                <a:solidFill>
-                  <a:srgbClr val="1F78C8"/>
-                </a:solidFill>
-                <a:latin typeface="Consolas"/>
-              </a:rPr>
-              <a:t>03_cost_by_request.sas</a:t>
+            <a:pPr/>
+            <a:r>
+              <a:rPr sz="2200">
+                <a:solidFill>
+                  <a:srgbClr val="444F5A"/>
+                </a:solidFill>
+                <a:latin typeface="Calibri"/>
+              </a:rPr>
+              <a:t>1. Cochran's Q: paired differences in accuracy across engines</a:t>
             </a:r>
           </a:p>
         </p:txBody>
@@ -6144,16 +6935,7 @@
                 </a:solidFill>
                 <a:latin typeface="Calibri"/>
               </a:rPr>
-              <a:t>•  The API returns </a:t>
-            </a:r>
-            <a:r>
-              <a:rPr sz="2200" b="1">
-                <a:solidFill>
-                  <a:srgbClr val="444F5A"/>
-                </a:solidFill>
-                <a:latin typeface="Calibri"/>
-              </a:rPr>
-              <a:t>tokens, not dollars</a:t>
+              <a:t>2. Brier score: calibration of stated confidence</a:t>
             </a:r>
           </a:p>
         </p:txBody>
@@ -6188,61 +6970,7 @@
                 </a:solidFill>
                 <a:latin typeface="Calibri"/>
               </a:rPr>
-              <a:t>•  Every response has a </a:t>
-            </a:r>
-            <a:r>
-              <a:rPr sz="2200">
-                <a:solidFill>
-                  <a:srgbClr val="1F78C8"/>
-                </a:solidFill>
-                <a:latin typeface="Consolas"/>
-              </a:rPr>
-              <a:t>usage</a:t>
-            </a:r>
-            <a:r>
-              <a:rPr sz="2200">
-                <a:solidFill>
-                  <a:srgbClr val="444F5A"/>
-                </a:solidFill>
-                <a:latin typeface="Calibri"/>
-              </a:rPr>
-              <a:t> block: </a:t>
-            </a:r>
-            <a:r>
-              <a:rPr sz="2200">
-                <a:solidFill>
-                  <a:srgbClr val="1F78C8"/>
-                </a:solidFill>
-                <a:latin typeface="Consolas"/>
-              </a:rPr>
-              <a:t>input_tokens</a:t>
-            </a:r>
-            <a:r>
-              <a:rPr sz="2200">
-                <a:solidFill>
-                  <a:srgbClr val="444F5A"/>
-                </a:solidFill>
-                <a:latin typeface="Calibri"/>
-              </a:rPr>
-              <a:t>, </a:t>
-            </a:r>
-            <a:r>
-              <a:rPr sz="2200">
-                <a:solidFill>
-                  <a:srgbClr val="1F78C8"/>
-                </a:solidFill>
-                <a:latin typeface="Consolas"/>
-              </a:rPr>
-              <a:t>output_tokens</a:t>
-            </a:r>
-            <a:r>
-              <a:rPr sz="2200">
-                <a:solidFill>
-                  <a:srgbClr val="444F5A"/>
-                </a:solidFill>
-                <a:latin typeface="Calibri"/>
-              </a:rPr>
-              <a:t>, cache token fields</a:t>
+              <a:t>3. Reliability bins: stated confidence vs. observed accuracy</a:t>
             </a:r>
           </a:p>
         </p:txBody>
@@ -6277,7 +7005,7 @@
                 </a:solidFill>
                 <a:latin typeface="Calibri"/>
               </a:rPr>
-              <a:t>•  Extracted with the same </a:t>
+              <a:t>4. </a:t>
             </a:r>
             <a:r>
               <a:rPr sz="2200">
@@ -6286,7 +7014,7 @@
                 </a:solidFill>
                 <a:latin typeface="Consolas"/>
               </a:rPr>
-              <a:t>json_field()</a:t>
+              <a:t>PROC FREQ AGREE</a:t>
             </a:r>
             <a:r>
               <a:rPr sz="2200">
@@ -6295,7 +7023,7 @@
                 </a:solidFill>
                 <a:latin typeface="Calibri"/>
               </a:rPr>
-              <a:t> helper</a:t>
+              <a:t>: weighted kappa for ordinal agreement</a:t>
             </a:r>
           </a:p>
         </p:txBody>
@@ -6322,15 +7050,59 @@
           </a:bodyPr>
           <a:lstStyle/>
           <a:p>
-            <a:pPr/>
-            <a:r>
-              <a:rPr sz="2200">
-                <a:solidFill>
-                  <a:srgbClr val="444F5A"/>
-                </a:solidFill>
-                <a:latin typeface="Calibri"/>
-              </a:rPr>
-              <a:t>•  Cost = tokens x price per million tokens</a:t>
+            <a:r>
+              <a:rPr sz="2200">
+                <a:solidFill>
+                  <a:srgbClr val="0B2A4A"/>
+                </a:solidFill>
+                <a:latin typeface="Calibri"/>
+              </a:rPr>
+              <a:t>Outputs: </a:t>
+            </a:r>
+            <a:r>
+              <a:rPr sz="2200">
+                <a:solidFill>
+                  <a:srgbClr val="1F78C8"/>
+                </a:solidFill>
+                <a:latin typeface="Consolas"/>
+              </a:rPr>
+              <a:t>proj.brier_scorecard</a:t>
+            </a:r>
+            <a:r>
+              <a:rPr sz="2200">
+                <a:solidFill>
+                  <a:srgbClr val="0B2A4A"/>
+                </a:solidFill>
+                <a:latin typeface="Calibri"/>
+              </a:rPr>
+              <a:t>, </a:t>
+            </a:r>
+            <a:r>
+              <a:rPr sz="2200">
+                <a:solidFill>
+                  <a:srgbClr val="1F78C8"/>
+                </a:solidFill>
+                <a:latin typeface="Consolas"/>
+              </a:rPr>
+              <a:t>proj.reliability_bins</a:t>
+            </a:r>
+            <a:r>
+              <a:rPr sz="2200">
+                <a:solidFill>
+                  <a:srgbClr val="0B2A4A"/>
+                </a:solidFill>
+                <a:latin typeface="Calibri"/>
+              </a:rPr>
+              <a:t>, </a:t>
+            </a:r>
+            <a:r>
+              <a:rPr sz="2200">
+                <a:solidFill>
+                  <a:srgbClr val="1F78C8"/>
+                </a:solidFill>
+                <a:latin typeface="Consolas"/>
+              </a:rPr>
+              <a:t>proj.cochran_q_result</a:t>
             </a:r>
           </a:p>
         </p:txBody>
@@ -6468,7 +7240,7 @@
                 </a:solidFill>
                 <a:latin typeface="Calibri"/>
               </a:rPr>
-              <a:t>Costing: editable price table</a:t>
+              <a:t>Costing: what the API returns</a:t>
             </a:r>
           </a:p>
         </p:txBody>
@@ -6509,46 +7281,35 @@
       </p:sp>
       <p:sp>
         <p:nvSpPr>
-          <p:cNvPr id="6" name="Rounded Rectangle 5"/>
-          <p:cNvSpPr/>
+          <p:cNvPr id="6" name="TextBox 5"/>
+          <p:cNvSpPr txBox="1"/>
           <p:nvPr/>
         </p:nvSpPr>
         <p:spPr>
           <a:xfrm>
             <a:off x="640080" y="1371600"/>
-            <a:ext cx="10881360" cy="1975103"/>
-          </a:xfrm>
-          <a:prstGeom prst="roundRect">
-            <a:avLst>
-              <a:gd name="adj" fmla="val 3000"/>
-            </a:avLst>
-          </a:prstGeom>
-          <a:solidFill>
-            <a:srgbClr val="1E1E2E"/>
-          </a:solidFill>
-          <a:ln>
-            <a:noFill/>
-          </a:ln>
-        </p:spPr>
-        <p:style>
-          <a:lnRef idx="1">
-            <a:schemeClr val="accent1"/>
-          </a:lnRef>
-          <a:fillRef idx="3">
-            <a:schemeClr val="accent1"/>
-          </a:fillRef>
-          <a:effectRef idx="2">
-            <a:schemeClr val="accent1"/>
-          </a:effectRef>
-          <a:fontRef idx="minor">
-            <a:schemeClr val="lt1"/>
-          </a:fontRef>
-        </p:style>
-        <p:txBody>
-          <a:bodyPr rtlCol="0" anchor="ctr"/>
-          <a:lstStyle/>
-          <a:p>
-            <a:pPr algn="ctr"/>
+            <a:ext cx="10881360" cy="548640"/>
+          </a:xfrm>
+          <a:prstGeom prst="rect">
+            <a:avLst/>
+          </a:prstGeom>
+          <a:noFill/>
+        </p:spPr>
+        <p:txBody>
+          <a:bodyPr wrap="square">
+            <a:spAutoFit/>
+          </a:bodyPr>
+          <a:lstStyle/>
+          <a:p>
+            <a:r>
+              <a:rPr sz="2200">
+                <a:solidFill>
+                  <a:srgbClr val="1F78C8"/>
+                </a:solidFill>
+                <a:latin typeface="Consolas"/>
+              </a:rPr>
+              <a:t>03_cost_by_request.sas</a:t>
+            </a:r>
           </a:p>
         </p:txBody>
       </p:sp>
@@ -6560,8 +7321,8 @@
         </p:nvSpPr>
         <p:spPr>
           <a:xfrm>
-            <a:off x="822960" y="1463040"/>
-            <a:ext cx="10515600" cy="1792223"/>
+            <a:off x="640080" y="1828800"/>
+            <a:ext cx="10881360" cy="548640"/>
           </a:xfrm>
           <a:prstGeom prst="rect">
             <a:avLst/>
@@ -6574,82 +7335,179 @@
           </a:bodyPr>
           <a:lstStyle/>
           <a:p>
-            <a:r>
-              <a:rPr sz="1600">
-                <a:solidFill>
-                  <a:srgbClr val="E6E6F0"/>
+            <a:pPr/>
+            <a:r>
+              <a:rPr sz="2200">
+                <a:solidFill>
+                  <a:srgbClr val="444F5A"/>
+                </a:solidFill>
+                <a:latin typeface="Calibri"/>
+              </a:rPr>
+              <a:t>•  The API returns </a:t>
+            </a:r>
+            <a:r>
+              <a:rPr sz="2200" b="1">
+                <a:solidFill>
+                  <a:srgbClr val="444F5A"/>
+                </a:solidFill>
+                <a:latin typeface="Calibri"/>
+              </a:rPr>
+              <a:t>tokens, not dollars</a:t>
+            </a:r>
+          </a:p>
+        </p:txBody>
+      </p:sp>
+      <p:sp>
+        <p:nvSpPr>
+          <p:cNvPr id="8" name="TextBox 7"/>
+          <p:cNvSpPr txBox="1"/>
+          <p:nvPr/>
+        </p:nvSpPr>
+        <p:spPr>
+          <a:xfrm>
+            <a:off x="640080" y="2286000"/>
+            <a:ext cx="10881360" cy="548640"/>
+          </a:xfrm>
+          <a:prstGeom prst="rect">
+            <a:avLst/>
+          </a:prstGeom>
+          <a:noFill/>
+        </p:spPr>
+        <p:txBody>
+          <a:bodyPr wrap="square">
+            <a:spAutoFit/>
+          </a:bodyPr>
+          <a:lstStyle/>
+          <a:p>
+            <a:pPr/>
+            <a:r>
+              <a:rPr sz="2200">
+                <a:solidFill>
+                  <a:srgbClr val="444F5A"/>
+                </a:solidFill>
+                <a:latin typeface="Calibri"/>
+              </a:rPr>
+              <a:t>•  Every response has a </a:t>
+            </a:r>
+            <a:r>
+              <a:rPr sz="2200">
+                <a:solidFill>
+                  <a:srgbClr val="1F78C8"/>
                 </a:solidFill>
                 <a:latin typeface="Consolas"/>
               </a:rPr>
-              <a:t>data proj.model_pricing;</a:t>
-            </a:r>
-          </a:p>
-          <a:p>
-            <a:r>
-              <a:rPr sz="1600">
-                <a:solidFill>
-                  <a:srgbClr val="E6E6F0"/>
+              <a:t>usage</a:t>
+            </a:r>
+            <a:r>
+              <a:rPr sz="2200">
+                <a:solidFill>
+                  <a:srgbClr val="444F5A"/>
+                </a:solidFill>
+                <a:latin typeface="Calibri"/>
+              </a:rPr>
+              <a:t> block: </a:t>
+            </a:r>
+            <a:r>
+              <a:rPr sz="2200">
+                <a:solidFill>
+                  <a:srgbClr val="1F78C8"/>
                 </a:solidFill>
                 <a:latin typeface="Consolas"/>
               </a:rPr>
-              <a:t>  ...</a:t>
-            </a:r>
-          </a:p>
-          <a:p>
-            <a:r>
-              <a:rPr sz="1600">
-                <a:solidFill>
-                  <a:srgbClr val="E6E6F0"/>
+              <a:t>input_tokens</a:t>
+            </a:r>
+            <a:r>
+              <a:rPr sz="2200">
+                <a:solidFill>
+                  <a:srgbClr val="444F5A"/>
+                </a:solidFill>
+                <a:latin typeface="Calibri"/>
+              </a:rPr>
+              <a:t>, </a:t>
+            </a:r>
+            <a:r>
+              <a:rPr sz="2200">
+                <a:solidFill>
+                  <a:srgbClr val="1F78C8"/>
                 </a:solidFill>
                 <a:latin typeface="Consolas"/>
               </a:rPr>
-              <a:t>claude-haiku-4-5-20251001 1  5</a:t>
-            </a:r>
-          </a:p>
-          <a:p>
-            <a:r>
-              <a:rPr sz="1600">
-                <a:solidFill>
-                  <a:srgbClr val="E6E6F0"/>
+              <a:t>output_tokens</a:t>
+            </a:r>
+            <a:r>
+              <a:rPr sz="2200">
+                <a:solidFill>
+                  <a:srgbClr val="444F5A"/>
+                </a:solidFill>
+                <a:latin typeface="Calibri"/>
+              </a:rPr>
+              <a:t>, cache token fields</a:t>
+            </a:r>
+          </a:p>
+        </p:txBody>
+      </p:sp>
+      <p:sp>
+        <p:nvSpPr>
+          <p:cNvPr id="9" name="TextBox 8"/>
+          <p:cNvSpPr txBox="1"/>
+          <p:nvPr/>
+        </p:nvSpPr>
+        <p:spPr>
+          <a:xfrm>
+            <a:off x="640080" y="2743200"/>
+            <a:ext cx="10881360" cy="548640"/>
+          </a:xfrm>
+          <a:prstGeom prst="rect">
+            <a:avLst/>
+          </a:prstGeom>
+          <a:noFill/>
+        </p:spPr>
+        <p:txBody>
+          <a:bodyPr wrap="square">
+            <a:spAutoFit/>
+          </a:bodyPr>
+          <a:lstStyle/>
+          <a:p>
+            <a:pPr/>
+            <a:r>
+              <a:rPr sz="2200">
+                <a:solidFill>
+                  <a:srgbClr val="444F5A"/>
+                </a:solidFill>
+                <a:latin typeface="Calibri"/>
+              </a:rPr>
+              <a:t>•  Extracted with the same </a:t>
+            </a:r>
+            <a:r>
+              <a:rPr sz="2200">
+                <a:solidFill>
+                  <a:srgbClr val="1F78C8"/>
                 </a:solidFill>
                 <a:latin typeface="Consolas"/>
               </a:rPr>
-              <a:t>claude-sonnet-5           2  10</a:t>
-            </a:r>
-          </a:p>
-          <a:p>
-            <a:r>
-              <a:rPr sz="1600">
-                <a:solidFill>
-                  <a:srgbClr val="E6E6F0"/>
-                </a:solidFill>
-                <a:latin typeface="Consolas"/>
-              </a:rPr>
-              <a:t>claude-opus-5-5           4  20</a:t>
-            </a:r>
-          </a:p>
-          <a:p>
-            <a:r>
-              <a:rPr sz="1600">
-                <a:solidFill>
-                  <a:srgbClr val="E6E6F0"/>
-                </a:solidFill>
-                <a:latin typeface="Consolas"/>
-              </a:rPr>
-              <a:t>;</a:t>
-            </a:r>
-          </a:p>
-        </p:txBody>
-      </p:sp>
-      <p:sp>
-        <p:nvSpPr>
-          <p:cNvPr id="8" name="TextBox 7"/>
-          <p:cNvSpPr txBox="1"/>
-          <p:nvPr/>
-        </p:nvSpPr>
-        <p:spPr>
-          <a:xfrm>
-            <a:off x="640080" y="3483863"/>
+              <a:t>json_field()</a:t>
+            </a:r>
+            <a:r>
+              <a:rPr sz="2200">
+                <a:solidFill>
+                  <a:srgbClr val="444F5A"/>
+                </a:solidFill>
+                <a:latin typeface="Calibri"/>
+              </a:rPr>
+              <a:t> helper</a:t>
+            </a:r>
+          </a:p>
+        </p:txBody>
+      </p:sp>
+      <p:sp>
+        <p:nvSpPr>
+          <p:cNvPr id="10" name="TextBox 9"/>
+          <p:cNvSpPr txBox="1"/>
+          <p:nvPr/>
+        </p:nvSpPr>
+        <p:spPr>
+          <a:xfrm>
+            <a:off x="640080" y="3200400"/>
             <a:ext cx="10881360" cy="548640"/>
           </a:xfrm>
           <a:prstGeom prst="rect">
@@ -6663,14 +7521,15 @@
           </a:bodyPr>
           <a:lstStyle/>
           <a:p>
-            <a:r>
-              <a:rPr sz="2200">
-                <a:solidFill>
-                  <a:srgbClr val="0B2A4A"/>
-                </a:solidFill>
-                <a:latin typeface="Calibri"/>
-              </a:rPr>
-              <a:t>$ per 1,000,000 tokens (input, output). Per the code comments: checked 2026-09-29, re-verify before budgeting; estimate only (cache and batch pricing not modeled).</a:t>
+            <a:pPr/>
+            <a:r>
+              <a:rPr sz="2200">
+                <a:solidFill>
+                  <a:srgbClr val="444F5A"/>
+                </a:solidFill>
+                <a:latin typeface="Calibri"/>
+              </a:rPr>
+              <a:t>•  Cost = tokens x price per million tokens</a:t>
             </a:r>
           </a:p>
         </p:txBody>
@@ -6808,7 +7667,7 @@
                 </a:solidFill>
                 <a:latin typeface="Calibri"/>
               </a:rPr>
-              <a:t>Costing: the math in SAS</a:t>
+              <a:t>Costing: editable price table</a:t>
             </a:r>
           </a:p>
         </p:txBody>
@@ -6856,7 +7715,7 @@
         <p:spPr>
           <a:xfrm>
             <a:off x="640080" y="1371600"/>
-            <a:ext cx="10881360" cy="1124712"/>
+            <a:ext cx="10881360" cy="1975103"/>
           </a:xfrm>
           <a:prstGeom prst="roundRect">
             <a:avLst>
@@ -6901,7 +7760,7 @@
         <p:spPr>
           <a:xfrm>
             <a:off x="822960" y="1463040"/>
-            <a:ext cx="10515600" cy="941832"/>
+            <a:ext cx="10515600" cy="1792223"/>
           </a:xfrm>
           <a:prstGeom prst="rect">
             <a:avLst/>
@@ -6921,7 +7780,7 @@
                 </a:solidFill>
                 <a:latin typeface="Consolas"/>
               </a:rPr>
-              <a:t>(u.billable_input_tokens  * p.input_price_per_mtok  / 1000000) as input_cost,</a:t>
+              <a:t>data proj.model_pricing;</a:t>
             </a:r>
           </a:p>
           <a:p>
@@ -6932,7 +7791,7 @@
                 </a:solidFill>
                 <a:latin typeface="Consolas"/>
               </a:rPr>
-              <a:t>(u.billable_output_tokens * p.output_price_per_mtok / 1000000) as output_cost,</a:t>
+              <a:t>  ...</a:t>
             </a:r>
           </a:p>
           <a:p>
@@ -6943,7 +7802,40 @@
                 </a:solidFill>
                 <a:latin typeface="Consolas"/>
               </a:rPr>
-              <a:t>calculated input_cost + calculated output_cost as est_cost_usd</a:t>
+              <a:t>claude-haiku-4-5-20251001 1  5</a:t>
+            </a:r>
+          </a:p>
+          <a:p>
+            <a:r>
+              <a:rPr sz="1600">
+                <a:solidFill>
+                  <a:srgbClr val="E6E6F0"/>
+                </a:solidFill>
+                <a:latin typeface="Consolas"/>
+              </a:rPr>
+              <a:t>claude-sonnet-5           2  10</a:t>
+            </a:r>
+          </a:p>
+          <a:p>
+            <a:r>
+              <a:rPr sz="1600">
+                <a:solidFill>
+                  <a:srgbClr val="E6E6F0"/>
+                </a:solidFill>
+                <a:latin typeface="Consolas"/>
+              </a:rPr>
+              <a:t>claude-opus-5-5           4  20</a:t>
+            </a:r>
+          </a:p>
+          <a:p>
+            <a:r>
+              <a:rPr sz="1600">
+                <a:solidFill>
+                  <a:srgbClr val="E6E6F0"/>
+                </a:solidFill>
+                <a:latin typeface="Consolas"/>
+              </a:rPr>
+              <a:t>;</a:t>
             </a:r>
           </a:p>
         </p:txBody>
@@ -6956,7 +7848,7 @@
         </p:nvSpPr>
         <p:spPr>
           <a:xfrm>
-            <a:off x="640080" y="2633472"/>
+            <a:off x="640080" y="3483863"/>
             <a:ext cx="10881360" cy="548640"/>
           </a:xfrm>
           <a:prstGeom prst="rect">
@@ -6977,148 +7869,7 @@
                 </a:solidFill>
                 <a:latin typeface="Calibri"/>
               </a:rPr>
-              <a:t>Outputs:</a:t>
-            </a:r>
-          </a:p>
-        </p:txBody>
-      </p:sp>
-      <p:sp>
-        <p:nvSpPr>
-          <p:cNvPr id="9" name="TextBox 8"/>
-          <p:cNvSpPr txBox="1"/>
-          <p:nvPr/>
-        </p:nvSpPr>
-        <p:spPr>
-          <a:xfrm>
-            <a:off x="640080" y="3090672"/>
-            <a:ext cx="10881360" cy="548640"/>
-          </a:xfrm>
-          <a:prstGeom prst="rect">
-            <a:avLst/>
-          </a:prstGeom>
-          <a:noFill/>
-        </p:spPr>
-        <p:txBody>
-          <a:bodyPr wrap="square">
-            <a:spAutoFit/>
-          </a:bodyPr>
-          <a:lstStyle/>
-          <a:p>
-            <a:pPr/>
-            <a:r>
-              <a:rPr sz="2200">
-                <a:solidFill>
-                  <a:srgbClr val="444F5A"/>
-                </a:solidFill>
-                <a:latin typeface="Calibri"/>
-              </a:rPr>
-              <a:t>•  </a:t>
-            </a:r>
-            <a:r>
-              <a:rPr sz="2200">
-                <a:solidFill>
-                  <a:srgbClr val="1F78C8"/>
-                </a:solidFill>
-                <a:latin typeface="Consolas"/>
-              </a:rPr>
-              <a:t>proj.claude_request_cost</a:t>
-            </a:r>
-            <a:r>
-              <a:rPr sz="2200">
-                <a:solidFill>
-                  <a:srgbClr val="444F5A"/>
-                </a:solidFill>
-                <a:latin typeface="Calibri"/>
-              </a:rPr>
-              <a:t> (one row per request)</a:t>
-            </a:r>
-          </a:p>
-        </p:txBody>
-      </p:sp>
-      <p:sp>
-        <p:nvSpPr>
-          <p:cNvPr id="10" name="TextBox 9"/>
-          <p:cNvSpPr txBox="1"/>
-          <p:nvPr/>
-        </p:nvSpPr>
-        <p:spPr>
-          <a:xfrm>
-            <a:off x="640080" y="3547872"/>
-            <a:ext cx="10881360" cy="548640"/>
-          </a:xfrm>
-          <a:prstGeom prst="rect">
-            <a:avLst/>
-          </a:prstGeom>
-          <a:noFill/>
-        </p:spPr>
-        <p:txBody>
-          <a:bodyPr wrap="square">
-            <a:spAutoFit/>
-          </a:bodyPr>
-          <a:lstStyle/>
-          <a:p>
-            <a:pPr/>
-            <a:r>
-              <a:rPr sz="2200">
-                <a:solidFill>
-                  <a:srgbClr val="444F5A"/>
-                </a:solidFill>
-                <a:latin typeface="Calibri"/>
-              </a:rPr>
-              <a:t>•  </a:t>
-            </a:r>
-            <a:r>
-              <a:rPr sz="2200">
-                <a:solidFill>
-                  <a:srgbClr val="1F78C8"/>
-                </a:solidFill>
-                <a:latin typeface="Consolas"/>
-              </a:rPr>
-              <a:t>proj.engine_cost_summary</a:t>
-            </a:r>
-            <a:r>
-              <a:rPr sz="2200">
-                <a:solidFill>
-                  <a:srgbClr val="444F5A"/>
-                </a:solidFill>
-                <a:latin typeface="Calibri"/>
-              </a:rPr>
-              <a:t> (total and average per engine)</a:t>
-            </a:r>
-          </a:p>
-        </p:txBody>
-      </p:sp>
-      <p:sp>
-        <p:nvSpPr>
-          <p:cNvPr id="11" name="TextBox 10"/>
-          <p:cNvSpPr txBox="1"/>
-          <p:nvPr/>
-        </p:nvSpPr>
-        <p:spPr>
-          <a:xfrm>
-            <a:off x="640080" y="4005072"/>
-            <a:ext cx="10881360" cy="548640"/>
-          </a:xfrm>
-          <a:prstGeom prst="rect">
-            <a:avLst/>
-          </a:prstGeom>
-          <a:noFill/>
-        </p:spPr>
-        <p:txBody>
-          <a:bodyPr wrap="square">
-            <a:spAutoFit/>
-          </a:bodyPr>
-          <a:lstStyle/>
-          <a:p>
-            <a:pPr/>
-            <a:r>
-              <a:rPr sz="2200">
-                <a:solidFill>
-                  <a:srgbClr val="444F5A"/>
-                </a:solidFill>
-                <a:latin typeface="Calibri"/>
-              </a:rPr>
-              <a:t>•  Review report for rows missing usage or pricing</a:t>
+              <a:t>$ per 1,000,000 tokens (input, output). Per the code comments: checked 2026-09-29, re-verify before budgeting; estimate only (cache and batch pricing not modeled).</a:t>
             </a:r>
           </a:p>
         </p:txBody>
@@ -7256,7 +8007,7 @@
                 </a:solidFill>
                 <a:latin typeface="Calibri"/>
               </a:rPr>
-              <a:t>Putting cost and accuracy together</a:t>
+              <a:t>Costing: the math in SAS</a:t>
             </a:r>
           </a:p>
         </p:txBody>
@@ -7291,6 +8042,905 @@
                 <a:latin typeface="Calibri"/>
               </a:rPr>
               <a:t>NoTSUG 2026  |  SAS + AI  |  19</a:t>
+            </a:r>
+          </a:p>
+        </p:txBody>
+      </p:sp>
+      <p:sp>
+        <p:nvSpPr>
+          <p:cNvPr id="6" name="Rounded Rectangle 5"/>
+          <p:cNvSpPr/>
+          <p:nvPr/>
+        </p:nvSpPr>
+        <p:spPr>
+          <a:xfrm>
+            <a:off x="640080" y="1371600"/>
+            <a:ext cx="10881360" cy="1124712"/>
+          </a:xfrm>
+          <a:prstGeom prst="roundRect">
+            <a:avLst>
+              <a:gd name="adj" fmla="val 3000"/>
+            </a:avLst>
+          </a:prstGeom>
+          <a:solidFill>
+            <a:srgbClr val="1E1E2E"/>
+          </a:solidFill>
+          <a:ln>
+            <a:noFill/>
+          </a:ln>
+        </p:spPr>
+        <p:style>
+          <a:lnRef idx="1">
+            <a:schemeClr val="accent1"/>
+          </a:lnRef>
+          <a:fillRef idx="3">
+            <a:schemeClr val="accent1"/>
+          </a:fillRef>
+          <a:effectRef idx="2">
+            <a:schemeClr val="accent1"/>
+          </a:effectRef>
+          <a:fontRef idx="minor">
+            <a:schemeClr val="lt1"/>
+          </a:fontRef>
+        </p:style>
+        <p:txBody>
+          <a:bodyPr rtlCol="0" anchor="ctr"/>
+          <a:lstStyle/>
+          <a:p>
+            <a:pPr algn="ctr"/>
+          </a:p>
+        </p:txBody>
+      </p:sp>
+      <p:sp>
+        <p:nvSpPr>
+          <p:cNvPr id="7" name="TextBox 6"/>
+          <p:cNvSpPr txBox="1"/>
+          <p:nvPr/>
+        </p:nvSpPr>
+        <p:spPr>
+          <a:xfrm>
+            <a:off x="822960" y="1463040"/>
+            <a:ext cx="10515600" cy="941832"/>
+          </a:xfrm>
+          <a:prstGeom prst="rect">
+            <a:avLst/>
+          </a:prstGeom>
+          <a:noFill/>
+        </p:spPr>
+        <p:txBody>
+          <a:bodyPr wrap="square">
+            <a:spAutoFit/>
+          </a:bodyPr>
+          <a:lstStyle/>
+          <a:p>
+            <a:r>
+              <a:rPr sz="1600">
+                <a:solidFill>
+                  <a:srgbClr val="E6E6F0"/>
+                </a:solidFill>
+                <a:latin typeface="Consolas"/>
+              </a:rPr>
+              <a:t>(u.billable_input_tokens  * p.input_price_per_mtok  / 1000000) as input_cost,</a:t>
+            </a:r>
+          </a:p>
+          <a:p>
+            <a:r>
+              <a:rPr sz="1600">
+                <a:solidFill>
+                  <a:srgbClr val="E6E6F0"/>
+                </a:solidFill>
+                <a:latin typeface="Consolas"/>
+              </a:rPr>
+              <a:t>(u.billable_output_tokens * p.output_price_per_mtok / 1000000) as output_cost,</a:t>
+            </a:r>
+          </a:p>
+          <a:p>
+            <a:r>
+              <a:rPr sz="1600">
+                <a:solidFill>
+                  <a:srgbClr val="E6E6F0"/>
+                </a:solidFill>
+                <a:latin typeface="Consolas"/>
+              </a:rPr>
+              <a:t>calculated input_cost + calculated output_cost as est_cost_usd</a:t>
+            </a:r>
+          </a:p>
+        </p:txBody>
+      </p:sp>
+      <p:sp>
+        <p:nvSpPr>
+          <p:cNvPr id="8" name="TextBox 7"/>
+          <p:cNvSpPr txBox="1"/>
+          <p:nvPr/>
+        </p:nvSpPr>
+        <p:spPr>
+          <a:xfrm>
+            <a:off x="640080" y="2633472"/>
+            <a:ext cx="10881360" cy="548640"/>
+          </a:xfrm>
+          <a:prstGeom prst="rect">
+            <a:avLst/>
+          </a:prstGeom>
+          <a:noFill/>
+        </p:spPr>
+        <p:txBody>
+          <a:bodyPr wrap="square">
+            <a:spAutoFit/>
+          </a:bodyPr>
+          <a:lstStyle/>
+          <a:p>
+            <a:r>
+              <a:rPr sz="2200">
+                <a:solidFill>
+                  <a:srgbClr val="0B2A4A"/>
+                </a:solidFill>
+                <a:latin typeface="Calibri"/>
+              </a:rPr>
+              <a:t>Outputs:</a:t>
+            </a:r>
+          </a:p>
+        </p:txBody>
+      </p:sp>
+      <p:sp>
+        <p:nvSpPr>
+          <p:cNvPr id="9" name="TextBox 8"/>
+          <p:cNvSpPr txBox="1"/>
+          <p:nvPr/>
+        </p:nvSpPr>
+        <p:spPr>
+          <a:xfrm>
+            <a:off x="640080" y="3090672"/>
+            <a:ext cx="10881360" cy="548640"/>
+          </a:xfrm>
+          <a:prstGeom prst="rect">
+            <a:avLst/>
+          </a:prstGeom>
+          <a:noFill/>
+        </p:spPr>
+        <p:txBody>
+          <a:bodyPr wrap="square">
+            <a:spAutoFit/>
+          </a:bodyPr>
+          <a:lstStyle/>
+          <a:p>
+            <a:pPr/>
+            <a:r>
+              <a:rPr sz="2200">
+                <a:solidFill>
+                  <a:srgbClr val="444F5A"/>
+                </a:solidFill>
+                <a:latin typeface="Calibri"/>
+              </a:rPr>
+              <a:t>•  </a:t>
+            </a:r>
+            <a:r>
+              <a:rPr sz="2200">
+                <a:solidFill>
+                  <a:srgbClr val="1F78C8"/>
+                </a:solidFill>
+                <a:latin typeface="Consolas"/>
+              </a:rPr>
+              <a:t>proj.claude_request_cost</a:t>
+            </a:r>
+            <a:r>
+              <a:rPr sz="2200">
+                <a:solidFill>
+                  <a:srgbClr val="444F5A"/>
+                </a:solidFill>
+                <a:latin typeface="Calibri"/>
+              </a:rPr>
+              <a:t> (one row per request)</a:t>
+            </a:r>
+          </a:p>
+        </p:txBody>
+      </p:sp>
+      <p:sp>
+        <p:nvSpPr>
+          <p:cNvPr id="10" name="TextBox 9"/>
+          <p:cNvSpPr txBox="1"/>
+          <p:nvPr/>
+        </p:nvSpPr>
+        <p:spPr>
+          <a:xfrm>
+            <a:off x="640080" y="3547872"/>
+            <a:ext cx="10881360" cy="548640"/>
+          </a:xfrm>
+          <a:prstGeom prst="rect">
+            <a:avLst/>
+          </a:prstGeom>
+          <a:noFill/>
+        </p:spPr>
+        <p:txBody>
+          <a:bodyPr wrap="square">
+            <a:spAutoFit/>
+          </a:bodyPr>
+          <a:lstStyle/>
+          <a:p>
+            <a:pPr/>
+            <a:r>
+              <a:rPr sz="2200">
+                <a:solidFill>
+                  <a:srgbClr val="444F5A"/>
+                </a:solidFill>
+                <a:latin typeface="Calibri"/>
+              </a:rPr>
+              <a:t>•  </a:t>
+            </a:r>
+            <a:r>
+              <a:rPr sz="2200">
+                <a:solidFill>
+                  <a:srgbClr val="1F78C8"/>
+                </a:solidFill>
+                <a:latin typeface="Consolas"/>
+              </a:rPr>
+              <a:t>proj.engine_cost_summary</a:t>
+            </a:r>
+            <a:r>
+              <a:rPr sz="2200">
+                <a:solidFill>
+                  <a:srgbClr val="444F5A"/>
+                </a:solidFill>
+                <a:latin typeface="Calibri"/>
+              </a:rPr>
+              <a:t> (total and average per engine)</a:t>
+            </a:r>
+          </a:p>
+        </p:txBody>
+      </p:sp>
+      <p:sp>
+        <p:nvSpPr>
+          <p:cNvPr id="11" name="TextBox 10"/>
+          <p:cNvSpPr txBox="1"/>
+          <p:nvPr/>
+        </p:nvSpPr>
+        <p:spPr>
+          <a:xfrm>
+            <a:off x="640080" y="4005072"/>
+            <a:ext cx="10881360" cy="548640"/>
+          </a:xfrm>
+          <a:prstGeom prst="rect">
+            <a:avLst/>
+          </a:prstGeom>
+          <a:noFill/>
+        </p:spPr>
+        <p:txBody>
+          <a:bodyPr wrap="square">
+            <a:spAutoFit/>
+          </a:bodyPr>
+          <a:lstStyle/>
+          <a:p>
+            <a:pPr/>
+            <a:r>
+              <a:rPr sz="2200">
+                <a:solidFill>
+                  <a:srgbClr val="444F5A"/>
+                </a:solidFill>
+                <a:latin typeface="Calibri"/>
+              </a:rPr>
+              <a:t>•  Review report for rows missing usage or pricing</a:t>
+            </a:r>
+          </a:p>
+        </p:txBody>
+      </p:sp>
+    </p:spTree>
+  </p:cSld>
+  <p:clrMapOvr>
+    <a:masterClrMapping/>
+  </p:clrMapOvr>
+</p:sld>
+</file>
+
+<file path=ppt/slides/slide2.xml><?xml version="1.0" encoding="utf-8"?>
+<p:sld xmlns:a="http://schemas.openxmlformats.org/drawingml/2006/main" xmlns:p="http://schemas.openxmlformats.org/presentationml/2006/main" xmlns:r="http://schemas.openxmlformats.org/officeDocument/2006/relationships">
+  <p:cSld>
+    <p:spTree>
+      <p:nvGrpSpPr>
+        <p:cNvPr id="1" name=""/>
+        <p:cNvGrpSpPr/>
+        <p:nvPr/>
+      </p:nvGrpSpPr>
+      <p:grpSpPr/>
+      <p:sp>
+        <p:nvSpPr>
+          <p:cNvPr id="2" name="Rectangle 1"/>
+          <p:cNvSpPr/>
+          <p:nvPr/>
+        </p:nvSpPr>
+        <p:spPr>
+          <a:xfrm>
+            <a:off x="0" y="0"/>
+            <a:ext cx="12191695" cy="1005840"/>
+          </a:xfrm>
+          <a:prstGeom prst="rect">
+            <a:avLst/>
+          </a:prstGeom>
+          <a:solidFill>
+            <a:srgbClr val="0B2A4A"/>
+          </a:solidFill>
+          <a:ln>
+            <a:noFill/>
+          </a:ln>
+        </p:spPr>
+        <p:style>
+          <a:lnRef idx="1">
+            <a:schemeClr val="accent1"/>
+          </a:lnRef>
+          <a:fillRef idx="3">
+            <a:schemeClr val="accent1"/>
+          </a:fillRef>
+          <a:effectRef idx="2">
+            <a:schemeClr val="accent1"/>
+          </a:effectRef>
+          <a:fontRef idx="minor">
+            <a:schemeClr val="lt1"/>
+          </a:fontRef>
+        </p:style>
+        <p:txBody>
+          <a:bodyPr rtlCol="0" anchor="ctr"/>
+          <a:lstStyle/>
+          <a:p>
+            <a:pPr algn="ctr"/>
+          </a:p>
+        </p:txBody>
+      </p:sp>
+      <p:sp>
+        <p:nvSpPr>
+          <p:cNvPr id="3" name="Rectangle 2"/>
+          <p:cNvSpPr/>
+          <p:nvPr/>
+        </p:nvSpPr>
+        <p:spPr>
+          <a:xfrm>
+            <a:off x="0" y="1005840"/>
+            <a:ext cx="12191695" cy="54864"/>
+          </a:xfrm>
+          <a:prstGeom prst="rect">
+            <a:avLst/>
+          </a:prstGeom>
+          <a:solidFill>
+            <a:srgbClr val="00A3A3"/>
+          </a:solidFill>
+          <a:ln>
+            <a:noFill/>
+          </a:ln>
+        </p:spPr>
+        <p:style>
+          <a:lnRef idx="1">
+            <a:schemeClr val="accent1"/>
+          </a:lnRef>
+          <a:fillRef idx="3">
+            <a:schemeClr val="accent1"/>
+          </a:fillRef>
+          <a:effectRef idx="2">
+            <a:schemeClr val="accent1"/>
+          </a:effectRef>
+          <a:fontRef idx="minor">
+            <a:schemeClr val="lt1"/>
+          </a:fontRef>
+        </p:style>
+        <p:txBody>
+          <a:bodyPr rtlCol="0" anchor="ctr"/>
+          <a:lstStyle/>
+          <a:p>
+            <a:pPr algn="ctr"/>
+          </a:p>
+        </p:txBody>
+      </p:sp>
+      <p:sp>
+        <p:nvSpPr>
+          <p:cNvPr id="4" name="TextBox 3"/>
+          <p:cNvSpPr txBox="1"/>
+          <p:nvPr/>
+        </p:nvSpPr>
+        <p:spPr>
+          <a:xfrm>
+            <a:off x="548640" y="137160"/>
+            <a:ext cx="10972800" cy="777240"/>
+          </a:xfrm>
+          <a:prstGeom prst="rect">
+            <a:avLst/>
+          </a:prstGeom>
+          <a:noFill/>
+        </p:spPr>
+        <p:txBody>
+          <a:bodyPr wrap="square" anchor="ctr">
+            <a:spAutoFit/>
+          </a:bodyPr>
+          <a:lstStyle/>
+          <a:p>
+            <a:r>
+              <a:rPr sz="3200" b="1">
+                <a:solidFill>
+                  <a:srgbClr val="FFFFFF"/>
+                </a:solidFill>
+                <a:latin typeface="Calibri"/>
+              </a:rPr>
+              <a:t>Agenda</a:t>
+            </a:r>
+          </a:p>
+        </p:txBody>
+      </p:sp>
+      <p:sp>
+        <p:nvSpPr>
+          <p:cNvPr id="5" name="TextBox 4"/>
+          <p:cNvSpPr txBox="1"/>
+          <p:nvPr/>
+        </p:nvSpPr>
+        <p:spPr>
+          <a:xfrm>
+            <a:off x="548640" y="6446520"/>
+            <a:ext cx="10972800" cy="320040"/>
+          </a:xfrm>
+          <a:prstGeom prst="rect">
+            <a:avLst/>
+          </a:prstGeom>
+          <a:noFill/>
+        </p:spPr>
+        <p:txBody>
+          <a:bodyPr wrap="square">
+            <a:spAutoFit/>
+          </a:bodyPr>
+          <a:lstStyle/>
+          <a:p>
+            <a:r>
+              <a:rPr sz="1100">
+                <a:solidFill>
+                  <a:srgbClr val="444F5A"/>
+                </a:solidFill>
+                <a:latin typeface="Calibri"/>
+              </a:rPr>
+              <a:t>NoTSUG 2026  |  SAS + AI  |  2</a:t>
+            </a:r>
+          </a:p>
+        </p:txBody>
+      </p:sp>
+      <p:sp>
+        <p:nvSpPr>
+          <p:cNvPr id="6" name="TextBox 5"/>
+          <p:cNvSpPr txBox="1"/>
+          <p:nvPr/>
+        </p:nvSpPr>
+        <p:spPr>
+          <a:xfrm>
+            <a:off x="640080" y="1371600"/>
+            <a:ext cx="10881360" cy="548640"/>
+          </a:xfrm>
+          <a:prstGeom prst="rect">
+            <a:avLst/>
+          </a:prstGeom>
+          <a:noFill/>
+        </p:spPr>
+        <p:txBody>
+          <a:bodyPr wrap="square">
+            <a:spAutoFit/>
+          </a:bodyPr>
+          <a:lstStyle/>
+          <a:p>
+            <a:pPr/>
+            <a:r>
+              <a:rPr sz="2200" b="0">
+                <a:solidFill>
+                  <a:srgbClr val="444F5A"/>
+                </a:solidFill>
+                <a:latin typeface="Calibri"/>
+              </a:rPr>
+              <a:t>1. The mind-reading problem: free text SAS can't quantify</a:t>
+            </a:r>
+          </a:p>
+        </p:txBody>
+      </p:sp>
+      <p:sp>
+        <p:nvSpPr>
+          <p:cNvPr id="7" name="TextBox 6"/>
+          <p:cNvSpPr txBox="1"/>
+          <p:nvPr/>
+        </p:nvSpPr>
+        <p:spPr>
+          <a:xfrm>
+            <a:off x="640080" y="1828800"/>
+            <a:ext cx="10881360" cy="548640"/>
+          </a:xfrm>
+          <a:prstGeom prst="rect">
+            <a:avLst/>
+          </a:prstGeom>
+          <a:noFill/>
+        </p:spPr>
+        <p:txBody>
+          <a:bodyPr wrap="square">
+            <a:spAutoFit/>
+          </a:bodyPr>
+          <a:lstStyle/>
+          <a:p>
+            <a:pPr/>
+            <a:r>
+              <a:rPr sz="2200" b="0">
+                <a:solidFill>
+                  <a:srgbClr val="444F5A"/>
+                </a:solidFill>
+                <a:latin typeface="Calibri"/>
+              </a:rPr>
+              <a:t>2. The setup: a SAS Studio project, built in GitHub</a:t>
+            </a:r>
+          </a:p>
+        </p:txBody>
+      </p:sp>
+      <p:sp>
+        <p:nvSpPr>
+          <p:cNvPr id="8" name="TextBox 7"/>
+          <p:cNvSpPr txBox="1"/>
+          <p:nvPr/>
+        </p:nvSpPr>
+        <p:spPr>
+          <a:xfrm>
+            <a:off x="640080" y="2286000"/>
+            <a:ext cx="10881360" cy="548640"/>
+          </a:xfrm>
+          <a:prstGeom prst="rect">
+            <a:avLst/>
+          </a:prstGeom>
+          <a:noFill/>
+        </p:spPr>
+        <p:txBody>
+          <a:bodyPr wrap="square">
+            <a:spAutoFit/>
+          </a:bodyPr>
+          <a:lstStyle/>
+          <a:p>
+            <a:pPr/>
+            <a:r>
+              <a:rPr sz="2200" b="0">
+                <a:solidFill>
+                  <a:srgbClr val="444F5A"/>
+                </a:solidFill>
+                <a:latin typeface="Calibri"/>
+              </a:rPr>
+              <a:t>3. Asking Claude: PROC HTTP calls from SAS</a:t>
+            </a:r>
+          </a:p>
+        </p:txBody>
+      </p:sp>
+      <p:sp>
+        <p:nvSpPr>
+          <p:cNvPr id="9" name="TextBox 8"/>
+          <p:cNvSpPr txBox="1"/>
+          <p:nvPr/>
+        </p:nvSpPr>
+        <p:spPr>
+          <a:xfrm>
+            <a:off x="640080" y="2743200"/>
+            <a:ext cx="10881360" cy="548640"/>
+          </a:xfrm>
+          <a:prstGeom prst="rect">
+            <a:avLst/>
+          </a:prstGeom>
+          <a:noFill/>
+        </p:spPr>
+        <p:txBody>
+          <a:bodyPr wrap="square">
+            <a:spAutoFit/>
+          </a:bodyPr>
+          <a:lstStyle/>
+          <a:p>
+            <a:pPr/>
+            <a:r>
+              <a:rPr sz="2200" b="0">
+                <a:solidFill>
+                  <a:srgbClr val="444F5A"/>
+                </a:solidFill>
+                <a:latin typeface="Calibri"/>
+              </a:rPr>
+              <a:t>4. Decoding the answer: parsing JSON back into data</a:t>
+            </a:r>
+          </a:p>
+        </p:txBody>
+      </p:sp>
+      <p:sp>
+        <p:nvSpPr>
+          <p:cNvPr id="10" name="TextBox 9"/>
+          <p:cNvSpPr txBox="1"/>
+          <p:nvPr/>
+        </p:nvSpPr>
+        <p:spPr>
+          <a:xfrm>
+            <a:off x="640080" y="3200400"/>
+            <a:ext cx="10881360" cy="548640"/>
+          </a:xfrm>
+          <a:prstGeom prst="rect">
+            <a:avLst/>
+          </a:prstGeom>
+          <a:noFill/>
+        </p:spPr>
+        <p:txBody>
+          <a:bodyPr wrap="square">
+            <a:spAutoFit/>
+          </a:bodyPr>
+          <a:lstStyle/>
+          <a:p>
+            <a:pPr/>
+            <a:r>
+              <a:rPr sz="2200" b="0">
+                <a:solidFill>
+                  <a:srgbClr val="444F5A"/>
+                </a:solidFill>
+                <a:latin typeface="Calibri"/>
+              </a:rPr>
+              <a:t>5. Which mind is worth the tokens? Accuracy, calibration, and cost</a:t>
+            </a:r>
+          </a:p>
+        </p:txBody>
+      </p:sp>
+      <p:sp>
+        <p:nvSpPr>
+          <p:cNvPr id="11" name="TextBox 10"/>
+          <p:cNvSpPr txBox="1"/>
+          <p:nvPr/>
+        </p:nvSpPr>
+        <p:spPr>
+          <a:xfrm>
+            <a:off x="640080" y="3657600"/>
+            <a:ext cx="10881360" cy="548640"/>
+          </a:xfrm>
+          <a:prstGeom prst="rect">
+            <a:avLst/>
+          </a:prstGeom>
+          <a:noFill/>
+        </p:spPr>
+        <p:txBody>
+          <a:bodyPr wrap="square">
+            <a:spAutoFit/>
+          </a:bodyPr>
+          <a:lstStyle/>
+          <a:p>
+            <a:pPr/>
+            <a:r>
+              <a:rPr sz="2200" b="0">
+                <a:solidFill>
+                  <a:srgbClr val="444F5A"/>
+                </a:solidFill>
+                <a:latin typeface="Calibri"/>
+              </a:rPr>
+              <a:t>6. From GitHub to SAS Studio: shipping the code</a:t>
+            </a:r>
+          </a:p>
+        </p:txBody>
+      </p:sp>
+      <p:sp>
+        <p:nvSpPr>
+          <p:cNvPr id="12" name="TextBox 11"/>
+          <p:cNvSpPr txBox="1"/>
+          <p:nvPr/>
+        </p:nvSpPr>
+        <p:spPr>
+          <a:xfrm>
+            <a:off x="640080" y="4114800"/>
+            <a:ext cx="10881360" cy="548640"/>
+          </a:xfrm>
+          <a:prstGeom prst="rect">
+            <a:avLst/>
+          </a:prstGeom>
+          <a:noFill/>
+        </p:spPr>
+        <p:txBody>
+          <a:bodyPr wrap="square">
+            <a:spAutoFit/>
+          </a:bodyPr>
+          <a:lstStyle/>
+          <a:p>
+            <a:pPr/>
+            <a:r>
+              <a:rPr sz="2200" b="0">
+                <a:solidFill>
+                  <a:srgbClr val="444F5A"/>
+                </a:solidFill>
+                <a:latin typeface="Calibri"/>
+              </a:rPr>
+              <a:t>7. Lessons learned and Q&amp;A</a:t>
+            </a:r>
+          </a:p>
+        </p:txBody>
+      </p:sp>
+      <p:sp>
+        <p:nvSpPr>
+          <p:cNvPr id="13" name="TextBox 12"/>
+          <p:cNvSpPr txBox="1"/>
+          <p:nvPr/>
+        </p:nvSpPr>
+        <p:spPr>
+          <a:xfrm>
+            <a:off x="640080" y="4572000"/>
+            <a:ext cx="10881360" cy="548640"/>
+          </a:xfrm>
+          <a:prstGeom prst="rect">
+            <a:avLst/>
+          </a:prstGeom>
+          <a:noFill/>
+        </p:spPr>
+        <p:txBody>
+          <a:bodyPr wrap="square">
+            <a:spAutoFit/>
+          </a:bodyPr>
+          <a:lstStyle/>
+          <a:p>
+            <a:r>
+              <a:rPr sz="2200" i="1">
+                <a:solidFill>
+                  <a:srgbClr val="0B2A4A"/>
+                </a:solidFill>
+                <a:latin typeface="Calibri"/>
+              </a:rPr>
+              <a:t>Every slide shows code exactly as it exists in the repo.</a:t>
+            </a:r>
+          </a:p>
+        </p:txBody>
+      </p:sp>
+    </p:spTree>
+  </p:cSld>
+  <p:clrMapOvr>
+    <a:masterClrMapping/>
+  </p:clrMapOvr>
+</p:sld>
+</file>
+
+<file path=ppt/slides/slide20.xml><?xml version="1.0" encoding="utf-8"?>
+<p:sld xmlns:a="http://schemas.openxmlformats.org/drawingml/2006/main" xmlns:p="http://schemas.openxmlformats.org/presentationml/2006/main" xmlns:r="http://schemas.openxmlformats.org/officeDocument/2006/relationships">
+  <p:cSld>
+    <p:spTree>
+      <p:nvGrpSpPr>
+        <p:cNvPr id="1" name=""/>
+        <p:cNvGrpSpPr/>
+        <p:nvPr/>
+      </p:nvGrpSpPr>
+      <p:grpSpPr/>
+      <p:sp>
+        <p:nvSpPr>
+          <p:cNvPr id="2" name="Rectangle 1"/>
+          <p:cNvSpPr/>
+          <p:nvPr/>
+        </p:nvSpPr>
+        <p:spPr>
+          <a:xfrm>
+            <a:off x="0" y="0"/>
+            <a:ext cx="12191695" cy="1005840"/>
+          </a:xfrm>
+          <a:prstGeom prst="rect">
+            <a:avLst/>
+          </a:prstGeom>
+          <a:solidFill>
+            <a:srgbClr val="0B2A4A"/>
+          </a:solidFill>
+          <a:ln>
+            <a:noFill/>
+          </a:ln>
+        </p:spPr>
+        <p:style>
+          <a:lnRef idx="1">
+            <a:schemeClr val="accent1"/>
+          </a:lnRef>
+          <a:fillRef idx="3">
+            <a:schemeClr val="accent1"/>
+          </a:fillRef>
+          <a:effectRef idx="2">
+            <a:schemeClr val="accent1"/>
+          </a:effectRef>
+          <a:fontRef idx="minor">
+            <a:schemeClr val="lt1"/>
+          </a:fontRef>
+        </p:style>
+        <p:txBody>
+          <a:bodyPr rtlCol="0" anchor="ctr"/>
+          <a:lstStyle/>
+          <a:p>
+            <a:pPr algn="ctr"/>
+          </a:p>
+        </p:txBody>
+      </p:sp>
+      <p:sp>
+        <p:nvSpPr>
+          <p:cNvPr id="3" name="Rectangle 2"/>
+          <p:cNvSpPr/>
+          <p:nvPr/>
+        </p:nvSpPr>
+        <p:spPr>
+          <a:xfrm>
+            <a:off x="0" y="1005840"/>
+            <a:ext cx="12191695" cy="54864"/>
+          </a:xfrm>
+          <a:prstGeom prst="rect">
+            <a:avLst/>
+          </a:prstGeom>
+          <a:solidFill>
+            <a:srgbClr val="00A3A3"/>
+          </a:solidFill>
+          <a:ln>
+            <a:noFill/>
+          </a:ln>
+        </p:spPr>
+        <p:style>
+          <a:lnRef idx="1">
+            <a:schemeClr val="accent1"/>
+          </a:lnRef>
+          <a:fillRef idx="3">
+            <a:schemeClr val="accent1"/>
+          </a:fillRef>
+          <a:effectRef idx="2">
+            <a:schemeClr val="accent1"/>
+          </a:effectRef>
+          <a:fontRef idx="minor">
+            <a:schemeClr val="lt1"/>
+          </a:fontRef>
+        </p:style>
+        <p:txBody>
+          <a:bodyPr rtlCol="0" anchor="ctr"/>
+          <a:lstStyle/>
+          <a:p>
+            <a:pPr algn="ctr"/>
+          </a:p>
+        </p:txBody>
+      </p:sp>
+      <p:sp>
+        <p:nvSpPr>
+          <p:cNvPr id="4" name="TextBox 3"/>
+          <p:cNvSpPr txBox="1"/>
+          <p:nvPr/>
+        </p:nvSpPr>
+        <p:spPr>
+          <a:xfrm>
+            <a:off x="548640" y="137160"/>
+            <a:ext cx="10972800" cy="777240"/>
+          </a:xfrm>
+          <a:prstGeom prst="rect">
+            <a:avLst/>
+          </a:prstGeom>
+          <a:noFill/>
+        </p:spPr>
+        <p:txBody>
+          <a:bodyPr wrap="square" anchor="ctr">
+            <a:spAutoFit/>
+          </a:bodyPr>
+          <a:lstStyle/>
+          <a:p>
+            <a:r>
+              <a:rPr sz="3200" b="1">
+                <a:solidFill>
+                  <a:srgbClr val="FFFFFF"/>
+                </a:solidFill>
+                <a:latin typeface="Calibri"/>
+              </a:rPr>
+              <a:t>Putting cost and accuracy together</a:t>
+            </a:r>
+          </a:p>
+        </p:txBody>
+      </p:sp>
+      <p:sp>
+        <p:nvSpPr>
+          <p:cNvPr id="5" name="TextBox 4"/>
+          <p:cNvSpPr txBox="1"/>
+          <p:nvPr/>
+        </p:nvSpPr>
+        <p:spPr>
+          <a:xfrm>
+            <a:off x="548640" y="6446520"/>
+            <a:ext cx="10972800" cy="320040"/>
+          </a:xfrm>
+          <a:prstGeom prst="rect">
+            <a:avLst/>
+          </a:prstGeom>
+          <a:noFill/>
+        </p:spPr>
+        <p:txBody>
+          <a:bodyPr wrap="square">
+            <a:spAutoFit/>
+          </a:bodyPr>
+          <a:lstStyle/>
+          <a:p>
+            <a:r>
+              <a:rPr sz="1100">
+                <a:solidFill>
+                  <a:srgbClr val="444F5A"/>
+                </a:solidFill>
+                <a:latin typeface="Calibri"/>
+              </a:rPr>
+              <a:t>NoTSUG 2026  |  SAS + AI  |  20</a:t>
             </a:r>
           </a:p>
         </p:txBody>
@@ -7683,779 +9333,6 @@
 </p:sld>
 </file>
 
-<file path=ppt/slides/slide2.xml><?xml version="1.0" encoding="utf-8"?>
-<p:sld xmlns:a="http://schemas.openxmlformats.org/drawingml/2006/main" xmlns:p="http://schemas.openxmlformats.org/presentationml/2006/main" xmlns:r="http://schemas.openxmlformats.org/officeDocument/2006/relationships">
-  <p:cSld>
-    <p:spTree>
-      <p:nvGrpSpPr>
-        <p:cNvPr id="1" name=""/>
-        <p:cNvGrpSpPr/>
-        <p:nvPr/>
-      </p:nvGrpSpPr>
-      <p:grpSpPr/>
-      <p:sp>
-        <p:nvSpPr>
-          <p:cNvPr id="2" name="Rectangle 1"/>
-          <p:cNvSpPr/>
-          <p:nvPr/>
-        </p:nvSpPr>
-        <p:spPr>
-          <a:xfrm>
-            <a:off x="0" y="0"/>
-            <a:ext cx="12191695" cy="1005840"/>
-          </a:xfrm>
-          <a:prstGeom prst="rect">
-            <a:avLst/>
-          </a:prstGeom>
-          <a:solidFill>
-            <a:srgbClr val="0B2A4A"/>
-          </a:solidFill>
-          <a:ln>
-            <a:noFill/>
-          </a:ln>
-        </p:spPr>
-        <p:style>
-          <a:lnRef idx="1">
-            <a:schemeClr val="accent1"/>
-          </a:lnRef>
-          <a:fillRef idx="3">
-            <a:schemeClr val="accent1"/>
-          </a:fillRef>
-          <a:effectRef idx="2">
-            <a:schemeClr val="accent1"/>
-          </a:effectRef>
-          <a:fontRef idx="minor">
-            <a:schemeClr val="lt1"/>
-          </a:fontRef>
-        </p:style>
-        <p:txBody>
-          <a:bodyPr rtlCol="0" anchor="ctr"/>
-          <a:lstStyle/>
-          <a:p>
-            <a:pPr algn="ctr"/>
-          </a:p>
-        </p:txBody>
-      </p:sp>
-      <p:sp>
-        <p:nvSpPr>
-          <p:cNvPr id="3" name="Rectangle 2"/>
-          <p:cNvSpPr/>
-          <p:nvPr/>
-        </p:nvSpPr>
-        <p:spPr>
-          <a:xfrm>
-            <a:off x="0" y="1005840"/>
-            <a:ext cx="12191695" cy="54864"/>
-          </a:xfrm>
-          <a:prstGeom prst="rect">
-            <a:avLst/>
-          </a:prstGeom>
-          <a:solidFill>
-            <a:srgbClr val="00A3A3"/>
-          </a:solidFill>
-          <a:ln>
-            <a:noFill/>
-          </a:ln>
-        </p:spPr>
-        <p:style>
-          <a:lnRef idx="1">
-            <a:schemeClr val="accent1"/>
-          </a:lnRef>
-          <a:fillRef idx="3">
-            <a:schemeClr val="accent1"/>
-          </a:fillRef>
-          <a:effectRef idx="2">
-            <a:schemeClr val="accent1"/>
-          </a:effectRef>
-          <a:fontRef idx="minor">
-            <a:schemeClr val="lt1"/>
-          </a:fontRef>
-        </p:style>
-        <p:txBody>
-          <a:bodyPr rtlCol="0" anchor="ctr"/>
-          <a:lstStyle/>
-          <a:p>
-            <a:pPr algn="ctr"/>
-          </a:p>
-        </p:txBody>
-      </p:sp>
-      <p:sp>
-        <p:nvSpPr>
-          <p:cNvPr id="4" name="TextBox 3"/>
-          <p:cNvSpPr txBox="1"/>
-          <p:nvPr/>
-        </p:nvSpPr>
-        <p:spPr>
-          <a:xfrm>
-            <a:off x="548640" y="137160"/>
-            <a:ext cx="10972800" cy="777240"/>
-          </a:xfrm>
-          <a:prstGeom prst="rect">
-            <a:avLst/>
-          </a:prstGeom>
-          <a:noFill/>
-        </p:spPr>
-        <p:txBody>
-          <a:bodyPr wrap="square" anchor="ctr">
-            <a:spAutoFit/>
-          </a:bodyPr>
-          <a:lstStyle/>
-          <a:p>
-            <a:r>
-              <a:rPr sz="3200" b="1">
-                <a:solidFill>
-                  <a:srgbClr val="FFFFFF"/>
-                </a:solidFill>
-                <a:latin typeface="Calibri"/>
-              </a:rPr>
-              <a:t>Agenda</a:t>
-            </a:r>
-          </a:p>
-        </p:txBody>
-      </p:sp>
-      <p:sp>
-        <p:nvSpPr>
-          <p:cNvPr id="5" name="TextBox 4"/>
-          <p:cNvSpPr txBox="1"/>
-          <p:nvPr/>
-        </p:nvSpPr>
-        <p:spPr>
-          <a:xfrm>
-            <a:off x="548640" y="6446520"/>
-            <a:ext cx="10972800" cy="320040"/>
-          </a:xfrm>
-          <a:prstGeom prst="rect">
-            <a:avLst/>
-          </a:prstGeom>
-          <a:noFill/>
-        </p:spPr>
-        <p:txBody>
-          <a:bodyPr wrap="square">
-            <a:spAutoFit/>
-          </a:bodyPr>
-          <a:lstStyle/>
-          <a:p>
-            <a:r>
-              <a:rPr sz="1100">
-                <a:solidFill>
-                  <a:srgbClr val="444F5A"/>
-                </a:solidFill>
-                <a:latin typeface="Calibri"/>
-              </a:rPr>
-              <a:t>NoTSUG 2026  |  SAS + AI  |  2</a:t>
-            </a:r>
-          </a:p>
-        </p:txBody>
-      </p:sp>
-      <p:sp>
-        <p:nvSpPr>
-          <p:cNvPr id="6" name="TextBox 5"/>
-          <p:cNvSpPr txBox="1"/>
-          <p:nvPr/>
-        </p:nvSpPr>
-        <p:spPr>
-          <a:xfrm>
-            <a:off x="640080" y="1371600"/>
-            <a:ext cx="10881360" cy="548640"/>
-          </a:xfrm>
-          <a:prstGeom prst="rect">
-            <a:avLst/>
-          </a:prstGeom>
-          <a:noFill/>
-        </p:spPr>
-        <p:txBody>
-          <a:bodyPr wrap="square">
-            <a:spAutoFit/>
-          </a:bodyPr>
-          <a:lstStyle/>
-          <a:p>
-            <a:pPr/>
-            <a:r>
-              <a:rPr sz="2200" b="0">
-                <a:solidFill>
-                  <a:srgbClr val="444F5A"/>
-                </a:solidFill>
-                <a:latin typeface="Calibri"/>
-              </a:rPr>
-              <a:t>1. The mind-reading problem: free text SAS can't quantify</a:t>
-            </a:r>
-          </a:p>
-        </p:txBody>
-      </p:sp>
-      <p:sp>
-        <p:nvSpPr>
-          <p:cNvPr id="7" name="TextBox 6"/>
-          <p:cNvSpPr txBox="1"/>
-          <p:nvPr/>
-        </p:nvSpPr>
-        <p:spPr>
-          <a:xfrm>
-            <a:off x="640080" y="1828800"/>
-            <a:ext cx="10881360" cy="548640"/>
-          </a:xfrm>
-          <a:prstGeom prst="rect">
-            <a:avLst/>
-          </a:prstGeom>
-          <a:noFill/>
-        </p:spPr>
-        <p:txBody>
-          <a:bodyPr wrap="square">
-            <a:spAutoFit/>
-          </a:bodyPr>
-          <a:lstStyle/>
-          <a:p>
-            <a:pPr/>
-            <a:r>
-              <a:rPr sz="2200" b="0">
-                <a:solidFill>
-                  <a:srgbClr val="444F5A"/>
-                </a:solidFill>
-                <a:latin typeface="Calibri"/>
-              </a:rPr>
-              <a:t>2. The setup: a SAS Studio project, built in GitHub</a:t>
-            </a:r>
-          </a:p>
-        </p:txBody>
-      </p:sp>
-      <p:sp>
-        <p:nvSpPr>
-          <p:cNvPr id="8" name="TextBox 7"/>
-          <p:cNvSpPr txBox="1"/>
-          <p:nvPr/>
-        </p:nvSpPr>
-        <p:spPr>
-          <a:xfrm>
-            <a:off x="640080" y="2286000"/>
-            <a:ext cx="10881360" cy="548640"/>
-          </a:xfrm>
-          <a:prstGeom prst="rect">
-            <a:avLst/>
-          </a:prstGeom>
-          <a:noFill/>
-        </p:spPr>
-        <p:txBody>
-          <a:bodyPr wrap="square">
-            <a:spAutoFit/>
-          </a:bodyPr>
-          <a:lstStyle/>
-          <a:p>
-            <a:pPr/>
-            <a:r>
-              <a:rPr sz="2200" b="0">
-                <a:solidFill>
-                  <a:srgbClr val="444F5A"/>
-                </a:solidFill>
-                <a:latin typeface="Calibri"/>
-              </a:rPr>
-              <a:t>3. Asking Claude: PROC HTTP calls from SAS</a:t>
-            </a:r>
-          </a:p>
-        </p:txBody>
-      </p:sp>
-      <p:sp>
-        <p:nvSpPr>
-          <p:cNvPr id="9" name="TextBox 8"/>
-          <p:cNvSpPr txBox="1"/>
-          <p:nvPr/>
-        </p:nvSpPr>
-        <p:spPr>
-          <a:xfrm>
-            <a:off x="640080" y="2743200"/>
-            <a:ext cx="10881360" cy="548640"/>
-          </a:xfrm>
-          <a:prstGeom prst="rect">
-            <a:avLst/>
-          </a:prstGeom>
-          <a:noFill/>
-        </p:spPr>
-        <p:txBody>
-          <a:bodyPr wrap="square">
-            <a:spAutoFit/>
-          </a:bodyPr>
-          <a:lstStyle/>
-          <a:p>
-            <a:pPr/>
-            <a:r>
-              <a:rPr sz="2200" b="0">
-                <a:solidFill>
-                  <a:srgbClr val="444F5A"/>
-                </a:solidFill>
-                <a:latin typeface="Calibri"/>
-              </a:rPr>
-              <a:t>4. Decoding the answer: parsing JSON back into data</a:t>
-            </a:r>
-          </a:p>
-        </p:txBody>
-      </p:sp>
-      <p:sp>
-        <p:nvSpPr>
-          <p:cNvPr id="10" name="TextBox 9"/>
-          <p:cNvSpPr txBox="1"/>
-          <p:nvPr/>
-        </p:nvSpPr>
-        <p:spPr>
-          <a:xfrm>
-            <a:off x="640080" y="3200400"/>
-            <a:ext cx="10881360" cy="548640"/>
-          </a:xfrm>
-          <a:prstGeom prst="rect">
-            <a:avLst/>
-          </a:prstGeom>
-          <a:noFill/>
-        </p:spPr>
-        <p:txBody>
-          <a:bodyPr wrap="square">
-            <a:spAutoFit/>
-          </a:bodyPr>
-          <a:lstStyle/>
-          <a:p>
-            <a:pPr/>
-            <a:r>
-              <a:rPr sz="2200" b="0">
-                <a:solidFill>
-                  <a:srgbClr val="444F5A"/>
-                </a:solidFill>
-                <a:latin typeface="Calibri"/>
-              </a:rPr>
-              <a:t>5. Which mind is worth the tokens? Accuracy, calibration, and cost</a:t>
-            </a:r>
-          </a:p>
-        </p:txBody>
-      </p:sp>
-      <p:sp>
-        <p:nvSpPr>
-          <p:cNvPr id="11" name="TextBox 10"/>
-          <p:cNvSpPr txBox="1"/>
-          <p:nvPr/>
-        </p:nvSpPr>
-        <p:spPr>
-          <a:xfrm>
-            <a:off x="640080" y="3657600"/>
-            <a:ext cx="10881360" cy="548640"/>
-          </a:xfrm>
-          <a:prstGeom prst="rect">
-            <a:avLst/>
-          </a:prstGeom>
-          <a:noFill/>
-        </p:spPr>
-        <p:txBody>
-          <a:bodyPr wrap="square">
-            <a:spAutoFit/>
-          </a:bodyPr>
-          <a:lstStyle/>
-          <a:p>
-            <a:pPr/>
-            <a:r>
-              <a:rPr sz="2200" b="0">
-                <a:solidFill>
-                  <a:srgbClr val="444F5A"/>
-                </a:solidFill>
-                <a:latin typeface="Calibri"/>
-              </a:rPr>
-              <a:t>6. From GitHub to SAS Studio: shipping the code</a:t>
-            </a:r>
-          </a:p>
-        </p:txBody>
-      </p:sp>
-      <p:sp>
-        <p:nvSpPr>
-          <p:cNvPr id="12" name="TextBox 11"/>
-          <p:cNvSpPr txBox="1"/>
-          <p:nvPr/>
-        </p:nvSpPr>
-        <p:spPr>
-          <a:xfrm>
-            <a:off x="640080" y="4114800"/>
-            <a:ext cx="10881360" cy="548640"/>
-          </a:xfrm>
-          <a:prstGeom prst="rect">
-            <a:avLst/>
-          </a:prstGeom>
-          <a:noFill/>
-        </p:spPr>
-        <p:txBody>
-          <a:bodyPr wrap="square">
-            <a:spAutoFit/>
-          </a:bodyPr>
-          <a:lstStyle/>
-          <a:p>
-            <a:pPr/>
-            <a:r>
-              <a:rPr sz="2200" b="0">
-                <a:solidFill>
-                  <a:srgbClr val="444F5A"/>
-                </a:solidFill>
-                <a:latin typeface="Calibri"/>
-              </a:rPr>
-              <a:t>7. Lessons learned and Q&amp;A</a:t>
-            </a:r>
-          </a:p>
-        </p:txBody>
-      </p:sp>
-      <p:sp>
-        <p:nvSpPr>
-          <p:cNvPr id="13" name="TextBox 12"/>
-          <p:cNvSpPr txBox="1"/>
-          <p:nvPr/>
-        </p:nvSpPr>
-        <p:spPr>
-          <a:xfrm>
-            <a:off x="640080" y="4572000"/>
-            <a:ext cx="10881360" cy="548640"/>
-          </a:xfrm>
-          <a:prstGeom prst="rect">
-            <a:avLst/>
-          </a:prstGeom>
-          <a:noFill/>
-        </p:spPr>
-        <p:txBody>
-          <a:bodyPr wrap="square">
-            <a:spAutoFit/>
-          </a:bodyPr>
-          <a:lstStyle/>
-          <a:p>
-            <a:r>
-              <a:rPr sz="2200" i="1">
-                <a:solidFill>
-                  <a:srgbClr val="0B2A4A"/>
-                </a:solidFill>
-                <a:latin typeface="Calibri"/>
-              </a:rPr>
-              <a:t>Every slide shows code exactly as it exists in the repo.</a:t>
-            </a:r>
-          </a:p>
-        </p:txBody>
-      </p:sp>
-    </p:spTree>
-  </p:cSld>
-  <p:clrMapOvr>
-    <a:masterClrMapping/>
-  </p:clrMapOvr>
-</p:sld>
-</file>
-
-<file path=ppt/slides/slide20.xml><?xml version="1.0" encoding="utf-8"?>
-<p:sld xmlns:a="http://schemas.openxmlformats.org/drawingml/2006/main" xmlns:p="http://schemas.openxmlformats.org/presentationml/2006/main" xmlns:r="http://schemas.openxmlformats.org/officeDocument/2006/relationships">
-  <p:cSld>
-    <p:spTree>
-      <p:nvGrpSpPr>
-        <p:cNvPr id="1" name=""/>
-        <p:cNvGrpSpPr/>
-        <p:nvPr/>
-      </p:nvGrpSpPr>
-      <p:grpSpPr/>
-      <p:sp>
-        <p:nvSpPr>
-          <p:cNvPr id="2" name="Rectangle 1"/>
-          <p:cNvSpPr/>
-          <p:nvPr/>
-        </p:nvSpPr>
-        <p:spPr>
-          <a:xfrm>
-            <a:off x="0" y="0"/>
-            <a:ext cx="12191695" cy="1005840"/>
-          </a:xfrm>
-          <a:prstGeom prst="rect">
-            <a:avLst/>
-          </a:prstGeom>
-          <a:solidFill>
-            <a:srgbClr val="0B2A4A"/>
-          </a:solidFill>
-          <a:ln>
-            <a:noFill/>
-          </a:ln>
-        </p:spPr>
-        <p:style>
-          <a:lnRef idx="1">
-            <a:schemeClr val="accent1"/>
-          </a:lnRef>
-          <a:fillRef idx="3">
-            <a:schemeClr val="accent1"/>
-          </a:fillRef>
-          <a:effectRef idx="2">
-            <a:schemeClr val="accent1"/>
-          </a:effectRef>
-          <a:fontRef idx="minor">
-            <a:schemeClr val="lt1"/>
-          </a:fontRef>
-        </p:style>
-        <p:txBody>
-          <a:bodyPr rtlCol="0" anchor="ctr"/>
-          <a:lstStyle/>
-          <a:p>
-            <a:pPr algn="ctr"/>
-          </a:p>
-        </p:txBody>
-      </p:sp>
-      <p:sp>
-        <p:nvSpPr>
-          <p:cNvPr id="3" name="Rectangle 2"/>
-          <p:cNvSpPr/>
-          <p:nvPr/>
-        </p:nvSpPr>
-        <p:spPr>
-          <a:xfrm>
-            <a:off x="0" y="1005840"/>
-            <a:ext cx="12191695" cy="54864"/>
-          </a:xfrm>
-          <a:prstGeom prst="rect">
-            <a:avLst/>
-          </a:prstGeom>
-          <a:solidFill>
-            <a:srgbClr val="00A3A3"/>
-          </a:solidFill>
-          <a:ln>
-            <a:noFill/>
-          </a:ln>
-        </p:spPr>
-        <p:style>
-          <a:lnRef idx="1">
-            <a:schemeClr val="accent1"/>
-          </a:lnRef>
-          <a:fillRef idx="3">
-            <a:schemeClr val="accent1"/>
-          </a:fillRef>
-          <a:effectRef idx="2">
-            <a:schemeClr val="accent1"/>
-          </a:effectRef>
-          <a:fontRef idx="minor">
-            <a:schemeClr val="lt1"/>
-          </a:fontRef>
-        </p:style>
-        <p:txBody>
-          <a:bodyPr rtlCol="0" anchor="ctr"/>
-          <a:lstStyle/>
-          <a:p>
-            <a:pPr algn="ctr"/>
-          </a:p>
-        </p:txBody>
-      </p:sp>
-      <p:sp>
-        <p:nvSpPr>
-          <p:cNvPr id="4" name="TextBox 3"/>
-          <p:cNvSpPr txBox="1"/>
-          <p:nvPr/>
-        </p:nvSpPr>
-        <p:spPr>
-          <a:xfrm>
-            <a:off x="548640" y="137160"/>
-            <a:ext cx="10972800" cy="777240"/>
-          </a:xfrm>
-          <a:prstGeom prst="rect">
-            <a:avLst/>
-          </a:prstGeom>
-          <a:noFill/>
-        </p:spPr>
-        <p:txBody>
-          <a:bodyPr wrap="square" anchor="ctr">
-            <a:spAutoFit/>
-          </a:bodyPr>
-          <a:lstStyle/>
-          <a:p>
-            <a:r>
-              <a:rPr sz="3200" b="1">
-                <a:solidFill>
-                  <a:srgbClr val="FFFFFF"/>
-                </a:solidFill>
-                <a:latin typeface="Calibri"/>
-              </a:rPr>
-              <a:t>GitHub builds the SAS code</a:t>
-            </a:r>
-          </a:p>
-        </p:txBody>
-      </p:sp>
-      <p:sp>
-        <p:nvSpPr>
-          <p:cNvPr id="5" name="TextBox 4"/>
-          <p:cNvSpPr txBox="1"/>
-          <p:nvPr/>
-        </p:nvSpPr>
-        <p:spPr>
-          <a:xfrm>
-            <a:off x="548640" y="6446520"/>
-            <a:ext cx="10972800" cy="320040"/>
-          </a:xfrm>
-          <a:prstGeom prst="rect">
-            <a:avLst/>
-          </a:prstGeom>
-          <a:noFill/>
-        </p:spPr>
-        <p:txBody>
-          <a:bodyPr wrap="square">
-            <a:spAutoFit/>
-          </a:bodyPr>
-          <a:lstStyle/>
-          <a:p>
-            <a:r>
-              <a:rPr sz="1100">
-                <a:solidFill>
-                  <a:srgbClr val="444F5A"/>
-                </a:solidFill>
-                <a:latin typeface="Calibri"/>
-              </a:rPr>
-              <a:t>NoTSUG 2026  |  SAS + AI  |  20</a:t>
-            </a:r>
-          </a:p>
-        </p:txBody>
-      </p:sp>
-      <p:sp>
-        <p:nvSpPr>
-          <p:cNvPr id="6" name="TextBox 5"/>
-          <p:cNvSpPr txBox="1"/>
-          <p:nvPr/>
-        </p:nvSpPr>
-        <p:spPr>
-          <a:xfrm>
-            <a:off x="640080" y="1371600"/>
-            <a:ext cx="10881360" cy="548640"/>
-          </a:xfrm>
-          <a:prstGeom prst="rect">
-            <a:avLst/>
-          </a:prstGeom>
-          <a:noFill/>
-        </p:spPr>
-        <p:txBody>
-          <a:bodyPr wrap="square">
-            <a:spAutoFit/>
-          </a:bodyPr>
-          <a:lstStyle/>
-          <a:p>
-            <a:pPr/>
-            <a:r>
-              <a:rPr sz="2200">
-                <a:solidFill>
-                  <a:srgbClr val="444F5A"/>
-                </a:solidFill>
-                <a:latin typeface="Calibri"/>
-              </a:rPr>
-              <a:t>•  All SAS lives in the repo; GitHub Copilot agent branches/PRs built the scaffold, run_all fixes, and model updates</a:t>
-            </a:r>
-          </a:p>
-        </p:txBody>
-      </p:sp>
-      <p:sp>
-        <p:nvSpPr>
-          <p:cNvPr id="7" name="TextBox 6"/>
-          <p:cNvSpPr txBox="1"/>
-          <p:nvPr/>
-        </p:nvSpPr>
-        <p:spPr>
-          <a:xfrm>
-            <a:off x="640080" y="2286000"/>
-            <a:ext cx="10881360" cy="548640"/>
-          </a:xfrm>
-          <a:prstGeom prst="rect">
-            <a:avLst/>
-          </a:prstGeom>
-          <a:noFill/>
-        </p:spPr>
-        <p:txBody>
-          <a:bodyPr wrap="square">
-            <a:spAutoFit/>
-          </a:bodyPr>
-          <a:lstStyle/>
-          <a:p>
-            <a:pPr/>
-            <a:r>
-              <a:rPr sz="2200">
-                <a:solidFill>
-                  <a:srgbClr val="444F5A"/>
-                </a:solidFill>
-                <a:latin typeface="Calibri"/>
-              </a:rPr>
-              <a:t>•  Branches seen in this repo: scaffolding, </a:t>
-            </a:r>
-            <a:r>
-              <a:rPr sz="2200">
-                <a:solidFill>
-                  <a:srgbClr val="1F78C8"/>
-                </a:solidFill>
-                <a:latin typeface="Consolas"/>
-              </a:rPr>
-              <a:t>update-run-all-sas</a:t>
-            </a:r>
-            <a:r>
-              <a:rPr sz="2200">
-                <a:solidFill>
-                  <a:srgbClr val="444F5A"/>
-                </a:solidFill>
-                <a:latin typeface="Calibri"/>
-              </a:rPr>
-              <a:t>, </a:t>
-            </a:r>
-            <a:r>
-              <a:rPr sz="2200">
-                <a:solidFill>
-                  <a:srgbClr val="1F78C8"/>
-                </a:solidFill>
-                <a:latin typeface="Consolas"/>
-              </a:rPr>
-              <a:t>research-sas-code-warning</a:t>
-            </a:r>
-            <a:r>
-              <a:rPr sz="2200">
-                <a:solidFill>
-                  <a:srgbClr val="444F5A"/>
-                </a:solidFill>
-                <a:latin typeface="Calibri"/>
-              </a:rPr>
-              <a:t>, </a:t>
-            </a:r>
-            <a:r>
-              <a:rPr sz="2200">
-                <a:solidFill>
-                  <a:srgbClr val="1F78C8"/>
-                </a:solidFill>
-                <a:latin typeface="Consolas"/>
-              </a:rPr>
-              <a:t>updates-from-sas-studio</a:t>
-            </a:r>
-          </a:p>
-        </p:txBody>
-      </p:sp>
-      <p:sp>
-        <p:nvSpPr>
-          <p:cNvPr id="8" name="TextBox 7"/>
-          <p:cNvSpPr txBox="1"/>
-          <p:nvPr/>
-        </p:nvSpPr>
-        <p:spPr>
-          <a:xfrm>
-            <a:off x="640080" y="3200400"/>
-            <a:ext cx="10881360" cy="548640"/>
-          </a:xfrm>
-          <a:prstGeom prst="rect">
-            <a:avLst/>
-          </a:prstGeom>
-          <a:noFill/>
-        </p:spPr>
-        <p:txBody>
-          <a:bodyPr wrap="square">
-            <a:spAutoFit/>
-          </a:bodyPr>
-          <a:lstStyle/>
-          <a:p>
-            <a:pPr/>
-            <a:r>
-              <a:rPr sz="2200">
-                <a:solidFill>
-                  <a:srgbClr val="444F5A"/>
-                </a:solidFill>
-                <a:latin typeface="Calibri"/>
-              </a:rPr>
-              <a:t>•  PR = review gate for AI-generated code; history = audit trail</a:t>
-            </a:r>
-          </a:p>
-        </p:txBody>
-      </p:sp>
-    </p:spTree>
-  </p:cSld>
-  <p:clrMapOvr>
-    <a:masterClrMapping/>
-  </p:clrMapOvr>
-</p:sld>
-</file>
-
 <file path=ppt/slides/slide21.xml><?xml version="1.0" encoding="utf-8"?>
 <p:sld xmlns:a="http://schemas.openxmlformats.org/drawingml/2006/main" xmlns:p="http://schemas.openxmlformats.org/presentationml/2006/main" xmlns:r="http://schemas.openxmlformats.org/officeDocument/2006/relationships">
   <p:cSld>
@@ -8581,7 +9458,7 @@
                 </a:solidFill>
                 <a:latin typeface="Calibri"/>
               </a:rPr>
-              <a:t>GitHub feeds SAS Studio</a:t>
+              <a:t>GitHub builds the SAS code</a:t>
             </a:r>
           </a:p>
         </p:txBody>
@@ -8650,25 +9527,7 @@
                 </a:solidFill>
                 <a:latin typeface="Calibri"/>
               </a:rPr>
-              <a:t>•  Open the </a:t>
-            </a:r>
-            <a:r>
-              <a:rPr sz="2200">
-                <a:solidFill>
-                  <a:srgbClr val="1F78C8"/>
-                </a:solidFill>
-                <a:latin typeface="Consolas"/>
-              </a:rPr>
-              <a:t>sas/</a:t>
-            </a:r>
-            <a:r>
-              <a:rPr sz="2200">
-                <a:solidFill>
-                  <a:srgbClr val="444F5A"/>
-                </a:solidFill>
-                <a:latin typeface="Calibri"/>
-              </a:rPr>
-              <a:t> folder as a SAS Studio project (or copy to Files)</a:t>
+              <a:t>•  All SAS lives in the repo; GitHub Copilot agent branches/PRs built the scaffold, run_all fixes, and model updates</a:t>
             </a:r>
           </a:p>
         </p:txBody>
@@ -8676,68 +9535,6 @@
       <p:sp>
         <p:nvSpPr>
           <p:cNvPr id="7" name="TextBox 6"/>
-          <p:cNvSpPr txBox="1"/>
-          <p:nvPr/>
-        </p:nvSpPr>
-        <p:spPr>
-          <a:xfrm>
-            <a:off x="640080" y="1828800"/>
-            <a:ext cx="10881360" cy="548640"/>
-          </a:xfrm>
-          <a:prstGeom prst="rect">
-            <a:avLst/>
-          </a:prstGeom>
-          <a:noFill/>
-        </p:spPr>
-        <p:txBody>
-          <a:bodyPr wrap="square">
-            <a:spAutoFit/>
-          </a:bodyPr>
-          <a:lstStyle/>
-          <a:p>
-            <a:pPr/>
-            <a:r>
-              <a:rPr sz="2200">
-                <a:solidFill>
-                  <a:srgbClr val="444F5A"/>
-                </a:solidFill>
-                <a:latin typeface="Calibri"/>
-              </a:rPr>
-              <a:t>•  Set </a:t>
-            </a:r>
-            <a:r>
-              <a:rPr sz="2200">
-                <a:solidFill>
-                  <a:srgbClr val="1F78C8"/>
-                </a:solidFill>
-                <a:latin typeface="Consolas"/>
-              </a:rPr>
-              <a:t>ANTHROPIC_API_KEY</a:t>
-            </a:r>
-            <a:r>
-              <a:rPr sz="2200">
-                <a:solidFill>
-                  <a:srgbClr val="444F5A"/>
-                </a:solidFill>
-                <a:latin typeface="Calibri"/>
-              </a:rPr>
-              <a:t> or key file in </a:t>
-            </a:r>
-            <a:r>
-              <a:rPr sz="2200">
-                <a:solidFill>
-                  <a:srgbClr val="1F78C8"/>
-                </a:solidFill>
-                <a:latin typeface="Consolas"/>
-              </a:rPr>
-              <a:t>autoexec.sas</a:t>
-            </a:r>
-          </a:p>
-        </p:txBody>
-      </p:sp>
-      <p:sp>
-        <p:nvSpPr>
-          <p:cNvPr id="8" name="TextBox 7"/>
           <p:cNvSpPr txBox="1"/>
           <p:nvPr/>
         </p:nvSpPr>
@@ -8765,7 +9562,7 @@
                 </a:solidFill>
                 <a:latin typeface="Calibri"/>
               </a:rPr>
-              <a:t>•  Run </a:t>
+              <a:t>•  Branches seen in this repo: scaffolding, </a:t>
             </a:r>
             <a:r>
               <a:rPr sz="2200">
@@ -8774,34 +9571,8 @@
                 </a:solidFill>
                 <a:latin typeface="Consolas"/>
               </a:rPr>
-              <a:t>run_all.sas</a:t>
-            </a:r>
-          </a:p>
-        </p:txBody>
-      </p:sp>
-      <p:sp>
-        <p:nvSpPr>
-          <p:cNvPr id="9" name="TextBox 8"/>
-          <p:cNvSpPr txBox="1"/>
-          <p:nvPr/>
-        </p:nvSpPr>
-        <p:spPr>
-          <a:xfrm>
-            <a:off x="640080" y="2743200"/>
-            <a:ext cx="10881360" cy="548640"/>
-          </a:xfrm>
-          <a:prstGeom prst="rect">
-            <a:avLst/>
-          </a:prstGeom>
-          <a:noFill/>
-        </p:spPr>
-        <p:txBody>
-          <a:bodyPr wrap="square">
-            <a:spAutoFit/>
-          </a:bodyPr>
-          <a:lstStyle/>
-          <a:p>
-            <a:pPr/>
+              <a:t>update-run-all-sas</a:t>
+            </a:r>
             <a:r>
               <a:rPr sz="2200">
                 <a:solidFill>
@@ -8809,7 +9580,7 @@
                 </a:solidFill>
                 <a:latin typeface="Calibri"/>
               </a:rPr>
-              <a:t>•  Edits made in SAS Studio flow back to GitHub (see the </a:t>
+              <a:t>, </a:t>
             </a:r>
             <a:r>
               <a:rPr sz="2200">
@@ -8818,23 +9589,32 @@
                 </a:solidFill>
                 <a:latin typeface="Consolas"/>
               </a:rPr>
+              <a:t>research-sas-code-warning</a:t>
+            </a:r>
+            <a:r>
+              <a:rPr sz="2200">
+                <a:solidFill>
+                  <a:srgbClr val="444F5A"/>
+                </a:solidFill>
+                <a:latin typeface="Calibri"/>
+              </a:rPr>
+              <a:t>, </a:t>
+            </a:r>
+            <a:r>
+              <a:rPr sz="2200">
+                <a:solidFill>
+                  <a:srgbClr val="1F78C8"/>
+                </a:solidFill>
+                <a:latin typeface="Consolas"/>
+              </a:rPr>
               <a:t>updates-from-sas-studio</a:t>
             </a:r>
-            <a:r>
-              <a:rPr sz="2200">
-                <a:solidFill>
-                  <a:srgbClr val="444F5A"/>
-                </a:solidFill>
-                <a:latin typeface="Calibri"/>
-              </a:rPr>
-              <a:t> branch)</a:t>
-            </a:r>
-          </a:p>
-        </p:txBody>
-      </p:sp>
-      <p:sp>
-        <p:nvSpPr>
-          <p:cNvPr id="10" name="TextBox 9"/>
+          </a:p>
+        </p:txBody>
+      </p:sp>
+      <p:sp>
+        <p:nvSpPr>
+          <p:cNvPr id="8" name="TextBox 7"/>
           <p:cNvSpPr txBox="1"/>
           <p:nvPr/>
         </p:nvSpPr>
@@ -8854,32 +9634,15 @@
           </a:bodyPr>
           <a:lstStyle/>
           <a:p>
-            <a:r>
-              <a:rPr sz="2200">
-                <a:solidFill>
-                  <a:srgbClr val="0B2A4A"/>
-                </a:solidFill>
-                <a:latin typeface="Calibri"/>
-              </a:rPr>
-              <a:t>Requires outbound HTTPS to </a:t>
-            </a:r>
-            <a:r>
-              <a:rPr sz="2200">
-                <a:solidFill>
-                  <a:srgbClr val="1F78C8"/>
-                </a:solidFill>
-                <a:latin typeface="Consolas"/>
-              </a:rPr>
-              <a:t>api.anthropic.com</a:t>
-            </a:r>
-            <a:r>
-              <a:rPr sz="2200">
-                <a:solidFill>
-                  <a:srgbClr val="0B2A4A"/>
-                </a:solidFill>
-                <a:latin typeface="Calibri"/>
-              </a:rPr>
-              <a:t>.</a:t>
+            <a:pPr/>
+            <a:r>
+              <a:rPr sz="2200">
+                <a:solidFill>
+                  <a:srgbClr val="444F5A"/>
+                </a:solidFill>
+                <a:latin typeface="Calibri"/>
+              </a:rPr>
+              <a:t>•  PR = review gate for AI-generated code; history = audit trail</a:t>
             </a:r>
           </a:p>
         </p:txBody>
@@ -9017,7 +9780,7 @@
                 </a:solidFill>
                 <a:latin typeface="Calibri"/>
               </a:rPr>
-              <a:t>Lessons from the code</a:t>
+              <a:t>GitHub feeds SAS Studio</a:t>
             </a:r>
           </a:p>
         </p:txBody>
@@ -9086,7 +9849,25 @@
                 </a:solidFill>
                 <a:latin typeface="Calibri"/>
               </a:rPr>
-              <a:t>•  Keep the prompt in its own file</a:t>
+              <a:t>•  Open the </a:t>
+            </a:r>
+            <a:r>
+              <a:rPr sz="2200">
+                <a:solidFill>
+                  <a:srgbClr val="1F78C8"/>
+                </a:solidFill>
+                <a:latin typeface="Consolas"/>
+              </a:rPr>
+              <a:t>sas/</a:t>
+            </a:r>
+            <a:r>
+              <a:rPr sz="2200">
+                <a:solidFill>
+                  <a:srgbClr val="444F5A"/>
+                </a:solidFill>
+                <a:latin typeface="Calibri"/>
+              </a:rPr>
+              <a:t> folder as a SAS Studio project (or copy to Files)</a:t>
             </a:r>
           </a:p>
         </p:txBody>
@@ -9121,7 +9902,34 @@
                 </a:solidFill>
                 <a:latin typeface="Calibri"/>
               </a:rPr>
-              <a:t>•  Split queue / execute / parse</a:t>
+              <a:t>•  Set </a:t>
+            </a:r>
+            <a:r>
+              <a:rPr sz="2200">
+                <a:solidFill>
+                  <a:srgbClr val="1F78C8"/>
+                </a:solidFill>
+                <a:latin typeface="Consolas"/>
+              </a:rPr>
+              <a:t>ANTHROPIC_API_KEY</a:t>
+            </a:r>
+            <a:r>
+              <a:rPr sz="2200">
+                <a:solidFill>
+                  <a:srgbClr val="444F5A"/>
+                </a:solidFill>
+                <a:latin typeface="Calibri"/>
+              </a:rPr>
+              <a:t> or key file in </a:t>
+            </a:r>
+            <a:r>
+              <a:rPr sz="2200">
+                <a:solidFill>
+                  <a:srgbClr val="1F78C8"/>
+                </a:solidFill>
+                <a:latin typeface="Consolas"/>
+              </a:rPr>
+              <a:t>autoexec.sas</a:t>
             </a:r>
           </a:p>
         </p:txBody>
@@ -9156,7 +9964,16 @@
                 </a:solidFill>
                 <a:latin typeface="Calibri"/>
               </a:rPr>
-              <a:t>•  Keep text in data, not macro variables</a:t>
+              <a:t>•  Run </a:t>
+            </a:r>
+            <a:r>
+              <a:rPr sz="2200">
+                <a:solidFill>
+                  <a:srgbClr val="1F78C8"/>
+                </a:solidFill>
+                <a:latin typeface="Consolas"/>
+              </a:rPr>
+              <a:t>run_all.sas</a:t>
             </a:r>
           </a:p>
         </p:txBody>
@@ -9191,7 +10008,7 @@
                 </a:solidFill>
                 <a:latin typeface="Calibri"/>
               </a:rPr>
-              <a:t>•  Fail visibly: </a:t>
+              <a:t>•  Edits made in SAS Studio flow back to GitHub (see the </a:t>
             </a:r>
             <a:r>
               <a:rPr sz="2200">
@@ -9200,7 +10017,7 @@
                 </a:solidFill>
                 <a:latin typeface="Consolas"/>
               </a:rPr>
-              <a:t>PARSE_ERROR</a:t>
+              <a:t>updates-from-sas-studio</a:t>
             </a:r>
             <a:r>
               <a:rPr sz="2200">
@@ -9209,25 +10026,7 @@
                 </a:solidFill>
                 <a:latin typeface="Calibri"/>
               </a:rPr>
-              <a:t>, </a:t>
-            </a:r>
-            <a:r>
-              <a:rPr sz="2200">
-                <a:solidFill>
-                  <a:srgbClr val="1F78C8"/>
-                </a:solidFill>
-                <a:latin typeface="Consolas"/>
-              </a:rPr>
-              <a:t>ERROR</a:t>
-            </a:r>
-            <a:r>
-              <a:rPr sz="2200">
-                <a:solidFill>
-                  <a:srgbClr val="444F5A"/>
-                </a:solidFill>
-                <a:latin typeface="Calibri"/>
-              </a:rPr>
-              <a:t> status, missing-usage report</a:t>
+              <a:t> branch)</a:t>
             </a:r>
           </a:p>
         </p:txBody>
@@ -9254,15 +10053,14 @@
           </a:bodyPr>
           <a:lstStyle/>
           <a:p>
-            <a:pPr/>
-            <a:r>
-              <a:rPr sz="2200">
-                <a:solidFill>
-                  <a:srgbClr val="444F5A"/>
-                </a:solidFill>
-                <a:latin typeface="Calibri"/>
-              </a:rPr>
-              <a:t>•  Models get retired (</a:t>
+            <a:r>
+              <a:rPr sz="2200">
+                <a:solidFill>
+                  <a:srgbClr val="0B2A4A"/>
+                </a:solidFill>
+                <a:latin typeface="Calibri"/>
+              </a:rPr>
+              <a:t>Requires outbound HTTPS to </a:t>
             </a:r>
             <a:r>
               <a:rPr sz="2200">
@@ -9271,51 +10069,16 @@
                 </a:solidFill>
                 <a:latin typeface="Consolas"/>
               </a:rPr>
-              <a:t>model_update_note.sas</a:t>
-            </a:r>
-            <a:r>
-              <a:rPr sz="2200">
-                <a:solidFill>
-                  <a:srgbClr val="444F5A"/>
-                </a:solidFill>
-                <a:latin typeface="Calibri"/>
-              </a:rPr>
-              <a:t>): keep the engine list in a table</a:t>
-            </a:r>
-          </a:p>
-        </p:txBody>
-      </p:sp>
-      <p:sp>
-        <p:nvSpPr>
-          <p:cNvPr id="11" name="TextBox 10"/>
-          <p:cNvSpPr txBox="1"/>
-          <p:nvPr/>
-        </p:nvSpPr>
-        <p:spPr>
-          <a:xfrm>
-            <a:off x="640080" y="3657600"/>
-            <a:ext cx="10881360" cy="548640"/>
-          </a:xfrm>
-          <a:prstGeom prst="rect">
-            <a:avLst/>
-          </a:prstGeom>
-          <a:noFill/>
-        </p:spPr>
-        <p:txBody>
-          <a:bodyPr wrap="square">
-            <a:spAutoFit/>
-          </a:bodyPr>
-          <a:lstStyle/>
-          <a:p>
-            <a:pPr/>
-            <a:r>
-              <a:rPr sz="2200">
-                <a:solidFill>
-                  <a:srgbClr val="444F5A"/>
-                </a:solidFill>
-                <a:latin typeface="Calibri"/>
-              </a:rPr>
-              <a:t>•  Never commit keys</a:t>
+              <a:t>api.anthropic.com</a:t>
+            </a:r>
+            <a:r>
+              <a:rPr sz="2200">
+                <a:solidFill>
+                  <a:srgbClr val="0B2A4A"/>
+                </a:solidFill>
+                <a:latin typeface="Calibri"/>
+              </a:rPr>
+              <a:t>.</a:t>
             </a:r>
           </a:p>
         </p:txBody>
@@ -9453,7 +10216,7 @@
                 </a:solidFill>
                 <a:latin typeface="Calibri"/>
               </a:rPr>
-              <a:t>Demo</a:t>
+              <a:t>Lessons from the code</a:t>
             </a:r>
           </a:p>
         </p:txBody>
@@ -9522,25 +10285,7 @@
                 </a:solidFill>
                 <a:latin typeface="Calibri"/>
               </a:rPr>
-              <a:t>1. </a:t>
-            </a:r>
-            <a:r>
-              <a:rPr sz="2200">
-                <a:solidFill>
-                  <a:srgbClr val="1F78C8"/>
-                </a:solidFill>
-                <a:latin typeface="Consolas"/>
-              </a:rPr>
-              <a:t>config.sas</a:t>
-            </a:r>
-            <a:r>
-              <a:rPr sz="2200">
-                <a:solidFill>
-                  <a:srgbClr val="444F5A"/>
-                </a:solidFill>
-                <a:latin typeface="Calibri"/>
-              </a:rPr>
-              <a:t>: engines and key</a:t>
+              <a:t>•  Keep the prompt in its own file</a:t>
             </a:r>
           </a:p>
         </p:txBody>
@@ -9575,34 +10320,7 @@
                 </a:solidFill>
                 <a:latin typeface="Calibri"/>
               </a:rPr>
-              <a:t>2. </a:t>
-            </a:r>
-            <a:r>
-              <a:rPr sz="2200">
-                <a:solidFill>
-                  <a:srgbClr val="1F78C8"/>
-                </a:solidFill>
-                <a:latin typeface="Consolas"/>
-              </a:rPr>
-              <a:t>01_prepare_requests.sas</a:t>
-            </a:r>
-            <a:r>
-              <a:rPr sz="2200">
-                <a:solidFill>
-                  <a:srgbClr val="444F5A"/>
-                </a:solidFill>
-                <a:latin typeface="Calibri"/>
-              </a:rPr>
-              <a:t> then </a:t>
-            </a:r>
-            <a:r>
-              <a:rPr sz="2200">
-                <a:solidFill>
-                  <a:srgbClr val="1F78C8"/>
-                </a:solidFill>
-                <a:latin typeface="Consolas"/>
-              </a:rPr>
-              <a:t>02_run_requests.sas</a:t>
+              <a:t>•  Split queue / execute / parse</a:t>
             </a:r>
           </a:p>
         </p:txBody>
@@ -9637,16 +10355,7 @@
                 </a:solidFill>
                 <a:latin typeface="Calibri"/>
               </a:rPr>
-              <a:t>3. </a:t>
-            </a:r>
-            <a:r>
-              <a:rPr sz="2200">
-                <a:solidFill>
-                  <a:srgbClr val="1F78C8"/>
-                </a:solidFill>
-                <a:latin typeface="Consolas"/>
-              </a:rPr>
-              <a:t>03_parse_requests.sas</a:t>
+              <a:t>•  Keep text in data, not macro variables</a:t>
             </a:r>
           </a:p>
         </p:txBody>
@@ -9681,7 +10390,131 @@
                 </a:solidFill>
                 <a:latin typeface="Calibri"/>
               </a:rPr>
-              <a:t>4. Scorecard, per-question view, cost summary</a:t>
+              <a:t>•  Fail visibly: </a:t>
+            </a:r>
+            <a:r>
+              <a:rPr sz="2200">
+                <a:solidFill>
+                  <a:srgbClr val="1F78C8"/>
+                </a:solidFill>
+                <a:latin typeface="Consolas"/>
+              </a:rPr>
+              <a:t>PARSE_ERROR</a:t>
+            </a:r>
+            <a:r>
+              <a:rPr sz="2200">
+                <a:solidFill>
+                  <a:srgbClr val="444F5A"/>
+                </a:solidFill>
+                <a:latin typeface="Calibri"/>
+              </a:rPr>
+              <a:t>, </a:t>
+            </a:r>
+            <a:r>
+              <a:rPr sz="2200">
+                <a:solidFill>
+                  <a:srgbClr val="1F78C8"/>
+                </a:solidFill>
+                <a:latin typeface="Consolas"/>
+              </a:rPr>
+              <a:t>ERROR</a:t>
+            </a:r>
+            <a:r>
+              <a:rPr sz="2200">
+                <a:solidFill>
+                  <a:srgbClr val="444F5A"/>
+                </a:solidFill>
+                <a:latin typeface="Calibri"/>
+              </a:rPr>
+              <a:t> status, missing-usage report</a:t>
+            </a:r>
+          </a:p>
+        </p:txBody>
+      </p:sp>
+      <p:sp>
+        <p:nvSpPr>
+          <p:cNvPr id="10" name="TextBox 9"/>
+          <p:cNvSpPr txBox="1"/>
+          <p:nvPr/>
+        </p:nvSpPr>
+        <p:spPr>
+          <a:xfrm>
+            <a:off x="640080" y="3200400"/>
+            <a:ext cx="10881360" cy="548640"/>
+          </a:xfrm>
+          <a:prstGeom prst="rect">
+            <a:avLst/>
+          </a:prstGeom>
+          <a:noFill/>
+        </p:spPr>
+        <p:txBody>
+          <a:bodyPr wrap="square">
+            <a:spAutoFit/>
+          </a:bodyPr>
+          <a:lstStyle/>
+          <a:p>
+            <a:pPr/>
+            <a:r>
+              <a:rPr sz="2200">
+                <a:solidFill>
+                  <a:srgbClr val="444F5A"/>
+                </a:solidFill>
+                <a:latin typeface="Calibri"/>
+              </a:rPr>
+              <a:t>•  Models get retired (</a:t>
+            </a:r>
+            <a:r>
+              <a:rPr sz="2200">
+                <a:solidFill>
+                  <a:srgbClr val="1F78C8"/>
+                </a:solidFill>
+                <a:latin typeface="Consolas"/>
+              </a:rPr>
+              <a:t>model_update_note.sas</a:t>
+            </a:r>
+            <a:r>
+              <a:rPr sz="2200">
+                <a:solidFill>
+                  <a:srgbClr val="444F5A"/>
+                </a:solidFill>
+                <a:latin typeface="Calibri"/>
+              </a:rPr>
+              <a:t>): keep the engine list in a table</a:t>
+            </a:r>
+          </a:p>
+        </p:txBody>
+      </p:sp>
+      <p:sp>
+        <p:nvSpPr>
+          <p:cNvPr id="11" name="TextBox 10"/>
+          <p:cNvSpPr txBox="1"/>
+          <p:nvPr/>
+        </p:nvSpPr>
+        <p:spPr>
+          <a:xfrm>
+            <a:off x="640080" y="3657600"/>
+            <a:ext cx="10881360" cy="548640"/>
+          </a:xfrm>
+          <a:prstGeom prst="rect">
+            <a:avLst/>
+          </a:prstGeom>
+          <a:noFill/>
+        </p:spPr>
+        <p:txBody>
+          <a:bodyPr wrap="square">
+            <a:spAutoFit/>
+          </a:bodyPr>
+          <a:lstStyle/>
+          <a:p>
+            <a:pPr/>
+            <a:r>
+              <a:rPr sz="2200">
+                <a:solidFill>
+                  <a:srgbClr val="444F5A"/>
+                </a:solidFill>
+                <a:latin typeface="Calibri"/>
+              </a:rPr>
+              <a:t>•  Never commit keys</a:t>
             </a:r>
           </a:p>
         </p:txBody>
@@ -9695,6 +10528,372 @@
 </file>
 
 <file path=ppt/slides/slide24.xml><?xml version="1.0" encoding="utf-8"?>
+<p:sld xmlns:a="http://schemas.openxmlformats.org/drawingml/2006/main" xmlns:p="http://schemas.openxmlformats.org/presentationml/2006/main" xmlns:r="http://schemas.openxmlformats.org/officeDocument/2006/relationships">
+  <p:cSld>
+    <p:spTree>
+      <p:nvGrpSpPr>
+        <p:cNvPr id="1" name=""/>
+        <p:cNvGrpSpPr/>
+        <p:nvPr/>
+      </p:nvGrpSpPr>
+      <p:grpSpPr/>
+      <p:sp>
+        <p:nvSpPr>
+          <p:cNvPr id="2" name="Rectangle 1"/>
+          <p:cNvSpPr/>
+          <p:nvPr/>
+        </p:nvSpPr>
+        <p:spPr>
+          <a:xfrm>
+            <a:off x="0" y="0"/>
+            <a:ext cx="12191695" cy="1005840"/>
+          </a:xfrm>
+          <a:prstGeom prst="rect">
+            <a:avLst/>
+          </a:prstGeom>
+          <a:solidFill>
+            <a:srgbClr val="0B2A4A"/>
+          </a:solidFill>
+          <a:ln>
+            <a:noFill/>
+          </a:ln>
+        </p:spPr>
+        <p:style>
+          <a:lnRef idx="1">
+            <a:schemeClr val="accent1"/>
+          </a:lnRef>
+          <a:fillRef idx="3">
+            <a:schemeClr val="accent1"/>
+          </a:fillRef>
+          <a:effectRef idx="2">
+            <a:schemeClr val="accent1"/>
+          </a:effectRef>
+          <a:fontRef idx="minor">
+            <a:schemeClr val="lt1"/>
+          </a:fontRef>
+        </p:style>
+        <p:txBody>
+          <a:bodyPr rtlCol="0" anchor="ctr"/>
+          <a:lstStyle/>
+          <a:p>
+            <a:pPr algn="ctr"/>
+          </a:p>
+        </p:txBody>
+      </p:sp>
+      <p:sp>
+        <p:nvSpPr>
+          <p:cNvPr id="3" name="Rectangle 2"/>
+          <p:cNvSpPr/>
+          <p:nvPr/>
+        </p:nvSpPr>
+        <p:spPr>
+          <a:xfrm>
+            <a:off x="0" y="1005840"/>
+            <a:ext cx="12191695" cy="54864"/>
+          </a:xfrm>
+          <a:prstGeom prst="rect">
+            <a:avLst/>
+          </a:prstGeom>
+          <a:solidFill>
+            <a:srgbClr val="00A3A3"/>
+          </a:solidFill>
+          <a:ln>
+            <a:noFill/>
+          </a:ln>
+        </p:spPr>
+        <p:style>
+          <a:lnRef idx="1">
+            <a:schemeClr val="accent1"/>
+          </a:lnRef>
+          <a:fillRef idx="3">
+            <a:schemeClr val="accent1"/>
+          </a:fillRef>
+          <a:effectRef idx="2">
+            <a:schemeClr val="accent1"/>
+          </a:effectRef>
+          <a:fontRef idx="minor">
+            <a:schemeClr val="lt1"/>
+          </a:fontRef>
+        </p:style>
+        <p:txBody>
+          <a:bodyPr rtlCol="0" anchor="ctr"/>
+          <a:lstStyle/>
+          <a:p>
+            <a:pPr algn="ctr"/>
+          </a:p>
+        </p:txBody>
+      </p:sp>
+      <p:sp>
+        <p:nvSpPr>
+          <p:cNvPr id="4" name="TextBox 3"/>
+          <p:cNvSpPr txBox="1"/>
+          <p:nvPr/>
+        </p:nvSpPr>
+        <p:spPr>
+          <a:xfrm>
+            <a:off x="548640" y="137160"/>
+            <a:ext cx="10972800" cy="777240"/>
+          </a:xfrm>
+          <a:prstGeom prst="rect">
+            <a:avLst/>
+          </a:prstGeom>
+          <a:noFill/>
+        </p:spPr>
+        <p:txBody>
+          <a:bodyPr wrap="square" anchor="ctr">
+            <a:spAutoFit/>
+          </a:bodyPr>
+          <a:lstStyle/>
+          <a:p>
+            <a:r>
+              <a:rPr sz="3200" b="1">
+                <a:solidFill>
+                  <a:srgbClr val="FFFFFF"/>
+                </a:solidFill>
+                <a:latin typeface="Calibri"/>
+              </a:rPr>
+              <a:t>Demo</a:t>
+            </a:r>
+          </a:p>
+        </p:txBody>
+      </p:sp>
+      <p:sp>
+        <p:nvSpPr>
+          <p:cNvPr id="5" name="TextBox 4"/>
+          <p:cNvSpPr txBox="1"/>
+          <p:nvPr/>
+        </p:nvSpPr>
+        <p:spPr>
+          <a:xfrm>
+            <a:off x="548640" y="6446520"/>
+            <a:ext cx="10972800" cy="320040"/>
+          </a:xfrm>
+          <a:prstGeom prst="rect">
+            <a:avLst/>
+          </a:prstGeom>
+          <a:noFill/>
+        </p:spPr>
+        <p:txBody>
+          <a:bodyPr wrap="square">
+            <a:spAutoFit/>
+          </a:bodyPr>
+          <a:lstStyle/>
+          <a:p>
+            <a:r>
+              <a:rPr sz="1100">
+                <a:solidFill>
+                  <a:srgbClr val="444F5A"/>
+                </a:solidFill>
+                <a:latin typeface="Calibri"/>
+              </a:rPr>
+              <a:t>NoTSUG 2026  |  SAS + AI  |  24</a:t>
+            </a:r>
+          </a:p>
+        </p:txBody>
+      </p:sp>
+      <p:sp>
+        <p:nvSpPr>
+          <p:cNvPr id="6" name="TextBox 5"/>
+          <p:cNvSpPr txBox="1"/>
+          <p:nvPr/>
+        </p:nvSpPr>
+        <p:spPr>
+          <a:xfrm>
+            <a:off x="640080" y="1371600"/>
+            <a:ext cx="10881360" cy="548640"/>
+          </a:xfrm>
+          <a:prstGeom prst="rect">
+            <a:avLst/>
+          </a:prstGeom>
+          <a:noFill/>
+        </p:spPr>
+        <p:txBody>
+          <a:bodyPr wrap="square">
+            <a:spAutoFit/>
+          </a:bodyPr>
+          <a:lstStyle/>
+          <a:p>
+            <a:pPr/>
+            <a:r>
+              <a:rPr sz="2200">
+                <a:solidFill>
+                  <a:srgbClr val="444F5A"/>
+                </a:solidFill>
+                <a:latin typeface="Calibri"/>
+              </a:rPr>
+              <a:t>1. </a:t>
+            </a:r>
+            <a:r>
+              <a:rPr sz="2200">
+                <a:solidFill>
+                  <a:srgbClr val="1F78C8"/>
+                </a:solidFill>
+                <a:latin typeface="Consolas"/>
+              </a:rPr>
+              <a:t>config.sas</a:t>
+            </a:r>
+            <a:r>
+              <a:rPr sz="2200">
+                <a:solidFill>
+                  <a:srgbClr val="444F5A"/>
+                </a:solidFill>
+                <a:latin typeface="Calibri"/>
+              </a:rPr>
+              <a:t>: engines and key</a:t>
+            </a:r>
+          </a:p>
+        </p:txBody>
+      </p:sp>
+      <p:sp>
+        <p:nvSpPr>
+          <p:cNvPr id="7" name="TextBox 6"/>
+          <p:cNvSpPr txBox="1"/>
+          <p:nvPr/>
+        </p:nvSpPr>
+        <p:spPr>
+          <a:xfrm>
+            <a:off x="640080" y="1828800"/>
+            <a:ext cx="10881360" cy="548640"/>
+          </a:xfrm>
+          <a:prstGeom prst="rect">
+            <a:avLst/>
+          </a:prstGeom>
+          <a:noFill/>
+        </p:spPr>
+        <p:txBody>
+          <a:bodyPr wrap="square">
+            <a:spAutoFit/>
+          </a:bodyPr>
+          <a:lstStyle/>
+          <a:p>
+            <a:pPr/>
+            <a:r>
+              <a:rPr sz="2200">
+                <a:solidFill>
+                  <a:srgbClr val="444F5A"/>
+                </a:solidFill>
+                <a:latin typeface="Calibri"/>
+              </a:rPr>
+              <a:t>2. </a:t>
+            </a:r>
+            <a:r>
+              <a:rPr sz="2200">
+                <a:solidFill>
+                  <a:srgbClr val="1F78C8"/>
+                </a:solidFill>
+                <a:latin typeface="Consolas"/>
+              </a:rPr>
+              <a:t>01_prepare_requests.sas</a:t>
+            </a:r>
+            <a:r>
+              <a:rPr sz="2200">
+                <a:solidFill>
+                  <a:srgbClr val="444F5A"/>
+                </a:solidFill>
+                <a:latin typeface="Calibri"/>
+              </a:rPr>
+              <a:t> then </a:t>
+            </a:r>
+            <a:r>
+              <a:rPr sz="2200">
+                <a:solidFill>
+                  <a:srgbClr val="1F78C8"/>
+                </a:solidFill>
+                <a:latin typeface="Consolas"/>
+              </a:rPr>
+              <a:t>02_run_requests.sas</a:t>
+            </a:r>
+          </a:p>
+        </p:txBody>
+      </p:sp>
+      <p:sp>
+        <p:nvSpPr>
+          <p:cNvPr id="8" name="TextBox 7"/>
+          <p:cNvSpPr txBox="1"/>
+          <p:nvPr/>
+        </p:nvSpPr>
+        <p:spPr>
+          <a:xfrm>
+            <a:off x="640080" y="2286000"/>
+            <a:ext cx="10881360" cy="548640"/>
+          </a:xfrm>
+          <a:prstGeom prst="rect">
+            <a:avLst/>
+          </a:prstGeom>
+          <a:noFill/>
+        </p:spPr>
+        <p:txBody>
+          <a:bodyPr wrap="square">
+            <a:spAutoFit/>
+          </a:bodyPr>
+          <a:lstStyle/>
+          <a:p>
+            <a:pPr/>
+            <a:r>
+              <a:rPr sz="2200">
+                <a:solidFill>
+                  <a:srgbClr val="444F5A"/>
+                </a:solidFill>
+                <a:latin typeface="Calibri"/>
+              </a:rPr>
+              <a:t>3. </a:t>
+            </a:r>
+            <a:r>
+              <a:rPr sz="2200">
+                <a:solidFill>
+                  <a:srgbClr val="1F78C8"/>
+                </a:solidFill>
+                <a:latin typeface="Consolas"/>
+              </a:rPr>
+              <a:t>03_parse_requests.sas</a:t>
+            </a:r>
+          </a:p>
+        </p:txBody>
+      </p:sp>
+      <p:sp>
+        <p:nvSpPr>
+          <p:cNvPr id="9" name="TextBox 8"/>
+          <p:cNvSpPr txBox="1"/>
+          <p:nvPr/>
+        </p:nvSpPr>
+        <p:spPr>
+          <a:xfrm>
+            <a:off x="640080" y="2743200"/>
+            <a:ext cx="10881360" cy="548640"/>
+          </a:xfrm>
+          <a:prstGeom prst="rect">
+            <a:avLst/>
+          </a:prstGeom>
+          <a:noFill/>
+        </p:spPr>
+        <p:txBody>
+          <a:bodyPr wrap="square">
+            <a:spAutoFit/>
+          </a:bodyPr>
+          <a:lstStyle/>
+          <a:p>
+            <a:pPr/>
+            <a:r>
+              <a:rPr sz="2200">
+                <a:solidFill>
+                  <a:srgbClr val="444F5A"/>
+                </a:solidFill>
+                <a:latin typeface="Calibri"/>
+              </a:rPr>
+              <a:t>4. Scorecard, per-question view, cost summary</a:t>
+            </a:r>
+          </a:p>
+        </p:txBody>
+      </p:sp>
+    </p:spTree>
+  </p:cSld>
+  <p:clrMapOvr>
+    <a:masterClrMapping/>
+  </p:clrMapOvr>
+</p:sld>
+</file>
+
+<file path=ppt/slides/slide25.xml><?xml version="1.0" encoding="utf-8"?>
 <p:sld xmlns:a="http://schemas.openxmlformats.org/drawingml/2006/main" xmlns:p="http://schemas.openxmlformats.org/presentationml/2006/main" xmlns:r="http://schemas.openxmlformats.org/officeDocument/2006/relationships">
   <p:cSld>
     <p:spTree>
